--- a/q1-q2-leistungskurs/02-analytische-geometrie-und-lineare-algebra/wiederholung.pptx
+++ b/q1-q2-leistungskurs/02-analytische-geometrie-und-lineare-algebra/wiederholung.pptx
@@ -464,746 +464,707 @@
 </file>
 
 <file path=ppt/notesSlides/notesSlide1.xml><?xml version="1.0" encoding="utf-8"?>
-<p:notes xmlns:a="http://schemas.openxmlformats.org/drawingml/2006/main" xmlns:r="http://schemas.openxmlformats.org/officeDocument/2006/relationships" xmlns:p="http://schemas.openxmlformats.org/presentationml/2006/main">
-  <p:cSld>
-    <p:spTree>
-      <p:nvGrpSpPr>
-        <p:cNvPr id="1" name=""/>
-        <p:cNvGrpSpPr/>
-        <p:nvPr/>
-      </p:nvGrpSpPr>
-      <p:grpSpPr>
+<ns0:notes xmlns:a="http://schemas.openxmlformats.org/drawingml/2006/main" xmlns:ns0="http://schemas.openxmlformats.org/presentationml/2006/main" xmlns:ns2="http://schemas.microsoft.com/office/powerpoint/2010/main">
+  <ns0:cSld>
+    <ns0:spTree>
+      <ns0:nvGrpSpPr>
+        <ns0:cNvPr id="1" name=""/>
+        <ns0:cNvGrpSpPr/>
+        <ns0:nvPr/>
+      </ns0:nvGrpSpPr>
+      <ns0:grpSpPr>
         <a:xfrm>
           <a:off x="0" y="0"/>
           <a:ext cx="0" cy="0"/>
           <a:chOff x="0" y="0"/>
           <a:chExt cx="0" cy="0"/>
         </a:xfrm>
-      </p:grpSpPr>
-      <p:sp>
-        <p:nvSpPr>
-          <p:cNvPr id="2" name="Slide Image Placeholder 1"/>
-          <p:cNvSpPr>
+      </ns0:grpSpPr>
+      <ns0:sp>
+        <ns0:nvSpPr>
+          <ns0:cNvPr id="2" name="Slide Image Placeholder 1"/>
+          <ns0:cNvSpPr>
             <a:spLocks noGrp="1" noRot="1" noChangeAspect="1"/>
-          </p:cNvSpPr>
-          <p:nvPr>
-            <p:ph type="sldImg"/>
-          </p:nvPr>
-        </p:nvSpPr>
-        <p:spPr/>
-      </p:sp>
-      <p:sp>
-        <p:nvSpPr>
-          <p:cNvPr id="3" name="Notes Placeholder 2"/>
-          <p:cNvSpPr>
+          </ns0:cNvSpPr>
+          <ns0:nvPr>
+            <ns0:ph type="sldImg"/>
+          </ns0:nvPr>
+        </ns0:nvSpPr>
+        <ns0:spPr/>
+      </ns0:sp>
+      <ns0:sp>
+        <ns0:nvSpPr>
+          <ns0:cNvPr id="3" name="Notes Placeholder 2"/>
+          <ns0:cNvSpPr>
             <a:spLocks noGrp="1"/>
-          </p:cNvSpPr>
-          <p:nvPr>
-            <p:ph type="body" idx="1"/>
-          </p:nvPr>
-        </p:nvSpPr>
-        <p:spPr/>
-        <p:txBody>
+          </ns0:cNvSpPr>
+          <ns0:nvPr>
+            <ns0:ph type="body" idx="1"/>
+          </ns0:nvPr>
+        </ns0:nvSpPr>
+        <ns0:spPr/>
+        <ns0:txBody>
           <a:bodyPr/>
           <a:lstStyle/>
           <a:p>
             <a:r>
               <a:rPr lang="en-US" dirty="0"/>
-              <a:t>Themengebiet: Analytische Geometrie und Lineare Algebra
-Stufe: Qualifikationsphase – Leistungskurs (Q1/Q2)
-Die Präsentation ist als kurze Wiederholung vor bzw. zu Beginn einer Unterrichtsphase gedacht.</a:t>
+              <a:t/>
             </a:r>
             <a:endParaRPr lang="en-US" dirty="0"/>
           </a:p>
-        </p:txBody>
-      </p:sp>
-      <p:sp>
-        <p:nvSpPr>
-          <p:cNvPr id="4" name="Slide Number Placeholder 3"/>
-          <p:cNvSpPr>
+        </ns0:txBody>
+      </ns0:sp>
+      <ns0:sp>
+        <ns0:nvSpPr>
+          <ns0:cNvPr id="4" name="Slide Number Placeholder 3"/>
+          <ns0:cNvSpPr>
             <a:spLocks noGrp="1"/>
-          </p:cNvSpPr>
-          <p:nvPr>
-            <p:ph type="sldNum" sz="quarter" idx="10"/>
-          </p:nvPr>
-        </p:nvSpPr>
-        <p:spPr/>
-        <p:txBody>
+          </ns0:cNvSpPr>
+          <ns0:nvPr>
+            <ns0:ph type="sldNum" sz="quarter" idx="10"/>
+          </ns0:nvPr>
+        </ns0:nvSpPr>
+        <ns0:spPr/>
+        <ns0:txBody>
           <a:bodyPr/>
           <a:lstStyle/>
           <a:p>
             <a:fld id="{F7021451-1387-4CA6-816F-3879F97B5CBC}" type="slidenum">
               <a:rPr lang="en-US"/>
-              <a:t>1</a:t>
+              <a:t/>
             </a:fld>
             <a:endParaRPr lang="en-US"/>
           </a:p>
-        </p:txBody>
-      </p:sp>
-    </p:spTree>
-    <p:extLst>
-      <p:ext uri="{BB962C8B-B14F-4D97-AF65-F5344CB8AC3E}">
-        <p14:creationId xmlns:p14="http://schemas.microsoft.com/office/powerpoint/2010/main" val="1024086991"/>
-      </p:ext>
-    </p:extLst>
-  </p:cSld>
-  <p:clrMapOvr>
+        </ns0:txBody>
+      </ns0:sp>
+    </ns0:spTree>
+    <ns0:extLst>
+      <ns0:ext uri="{BB962C8B-B14F-4D97-AF65-F5344CB8AC3E}">
+        <ns2:creationId val="1024086991"/>
+      </ns0:ext>
+    </ns0:extLst>
+  </ns0:cSld>
+  <ns0:clrMapOvr>
     <a:masterClrMapping/>
-  </p:clrMapOvr>
-</p:notes>
+  </ns0:clrMapOvr>
+</ns0:notes>
 </file>
 
 <file path=ppt/notesSlides/notesSlide2.xml><?xml version="1.0" encoding="utf-8"?>
-<p:notes xmlns:a="http://schemas.openxmlformats.org/drawingml/2006/main" xmlns:r="http://schemas.openxmlformats.org/officeDocument/2006/relationships" xmlns:p="http://schemas.openxmlformats.org/presentationml/2006/main">
-  <p:cSld>
-    <p:spTree>
-      <p:nvGrpSpPr>
-        <p:cNvPr id="1" name=""/>
-        <p:cNvGrpSpPr/>
-        <p:nvPr/>
-      </p:nvGrpSpPr>
-      <p:grpSpPr>
+<ns0:notes xmlns:a="http://schemas.openxmlformats.org/drawingml/2006/main" xmlns:ns0="http://schemas.openxmlformats.org/presentationml/2006/main" xmlns:ns2="http://schemas.microsoft.com/office/powerpoint/2010/main">
+  <ns0:cSld>
+    <ns0:spTree>
+      <ns0:nvGrpSpPr>
+        <ns0:cNvPr id="1" name=""/>
+        <ns0:cNvGrpSpPr/>
+        <ns0:nvPr/>
+      </ns0:nvGrpSpPr>
+      <ns0:grpSpPr>
         <a:xfrm>
           <a:off x="0" y="0"/>
           <a:ext cx="0" cy="0"/>
           <a:chOff x="0" y="0"/>
           <a:chExt cx="0" cy="0"/>
         </a:xfrm>
-      </p:grpSpPr>
-      <p:sp>
-        <p:nvSpPr>
-          <p:cNvPr id="2" name="Slide Image Placeholder 1"/>
-          <p:cNvSpPr>
+      </ns0:grpSpPr>
+      <ns0:sp>
+        <ns0:nvSpPr>
+          <ns0:cNvPr id="2" name="Slide Image Placeholder 1"/>
+          <ns0:cNvSpPr>
             <a:spLocks noGrp="1" noRot="1" noChangeAspect="1"/>
-          </p:cNvSpPr>
-          <p:nvPr>
-            <p:ph type="sldImg"/>
-          </p:nvPr>
-        </p:nvSpPr>
-        <p:spPr/>
-      </p:sp>
-      <p:sp>
-        <p:nvSpPr>
-          <p:cNvPr id="3" name="Notes Placeholder 2"/>
-          <p:cNvSpPr>
+          </ns0:cNvSpPr>
+          <ns0:nvPr>
+            <ns0:ph type="sldImg"/>
+          </ns0:nvPr>
+        </ns0:nvSpPr>
+        <ns0:spPr/>
+      </ns0:sp>
+      <ns0:sp>
+        <ns0:nvSpPr>
+          <ns0:cNvPr id="3" name="Notes Placeholder 2"/>
+          <ns0:cNvSpPr>
             <a:spLocks noGrp="1"/>
-          </p:cNvSpPr>
-          <p:nvPr>
-            <p:ph type="body" idx="1"/>
-          </p:nvPr>
-        </p:nvSpPr>
-        <p:spPr/>
-        <p:txBody>
+          </ns0:cNvSpPr>
+          <ns0:nvPr>
+            <ns0:ph type="body" idx="1"/>
+          </ns0:nvPr>
+        </ns0:nvSpPr>
+        <ns0:spPr/>
+        <ns0:txBody>
           <a:bodyPr/>
           <a:lstStyle/>
           <a:p>
             <a:r>
               <a:rPr lang="en-US" dirty="0"/>
-              <a:t>1. u·v bei u=(1,2), v=(3,−1)?
-Lösung: 1·3+2·(−1)=1.
-2. Was ist ein Normalenvektor einer Ebene?
-Lösung: Ein Vektor senkrecht zu allen Richtungen der Ebene.
-3. Wie findet man den Schnittpunkt einer Geraden mit einer Ebene?
-Lösung: Gerade in Ebenengleichung einsetzen und Parameter lösen.
-4. Abstand zweier Punkte A,B?
-Lösung: |AB|.</a:t>
+              <a:t/>
             </a:r>
             <a:endParaRPr lang="en-US" dirty="0"/>
           </a:p>
-        </p:txBody>
-      </p:sp>
-      <p:sp>
-        <p:nvSpPr>
-          <p:cNvPr id="4" name="Slide Number Placeholder 3"/>
-          <p:cNvSpPr>
+        </ns0:txBody>
+      </ns0:sp>
+      <ns0:sp>
+        <ns0:nvSpPr>
+          <ns0:cNvPr id="4" name="Slide Number Placeholder 3"/>
+          <ns0:cNvSpPr>
             <a:spLocks noGrp="1"/>
-          </p:cNvSpPr>
-          <p:nvPr>
-            <p:ph type="sldNum" sz="quarter" idx="10"/>
-          </p:nvPr>
-        </p:nvSpPr>
-        <p:spPr/>
-        <p:txBody>
+          </ns0:cNvSpPr>
+          <ns0:nvPr>
+            <ns0:ph type="sldNum" sz="quarter" idx="10"/>
+          </ns0:nvPr>
+        </ns0:nvSpPr>
+        <ns0:spPr/>
+        <ns0:txBody>
           <a:bodyPr/>
           <a:lstStyle/>
           <a:p>
             <a:fld id="{F7021451-1387-4CA6-816F-3879F97B5CBC}" type="slidenum">
               <a:rPr lang="en-US"/>
-              <a:t>2</a:t>
+              <a:t/>
             </a:fld>
             <a:endParaRPr lang="en-US"/>
           </a:p>
-        </p:txBody>
-      </p:sp>
-    </p:spTree>
-    <p:extLst>
-      <p:ext uri="{BB962C8B-B14F-4D97-AF65-F5344CB8AC3E}">
-        <p14:creationId xmlns:p14="http://schemas.microsoft.com/office/powerpoint/2010/main" val="1024086991"/>
-      </p:ext>
-    </p:extLst>
-  </p:cSld>
-  <p:clrMapOvr>
+        </ns0:txBody>
+      </ns0:sp>
+    </ns0:spTree>
+    <ns0:extLst>
+      <ns0:ext uri="{BB962C8B-B14F-4D97-AF65-F5344CB8AC3E}">
+        <ns2:creationId val="1024086991"/>
+      </ns0:ext>
+    </ns0:extLst>
+  </ns0:cSld>
+  <ns0:clrMapOvr>
     <a:masterClrMapping/>
-  </p:clrMapOvr>
-</p:notes>
+  </ns0:clrMapOvr>
+</ns0:notes>
 </file>
 
 <file path=ppt/notesSlides/notesSlide3.xml><?xml version="1.0" encoding="utf-8"?>
-<p:notes xmlns:a="http://schemas.openxmlformats.org/drawingml/2006/main" xmlns:r="http://schemas.openxmlformats.org/officeDocument/2006/relationships" xmlns:p="http://schemas.openxmlformats.org/presentationml/2006/main">
-  <p:cSld>
-    <p:spTree>
-      <p:nvGrpSpPr>
-        <p:cNvPr id="1" name=""/>
-        <p:cNvGrpSpPr/>
-        <p:nvPr/>
-      </p:nvGrpSpPr>
-      <p:grpSpPr>
+<ns0:notes xmlns:a="http://schemas.openxmlformats.org/drawingml/2006/main" xmlns:ns0="http://schemas.openxmlformats.org/presentationml/2006/main" xmlns:ns2="http://schemas.microsoft.com/office/powerpoint/2010/main">
+  <ns0:cSld>
+    <ns0:spTree>
+      <ns0:nvGrpSpPr>
+        <ns0:cNvPr id="1" name=""/>
+        <ns0:cNvGrpSpPr/>
+        <ns0:nvPr/>
+      </ns0:nvGrpSpPr>
+      <ns0:grpSpPr>
         <a:xfrm>
           <a:off x="0" y="0"/>
           <a:ext cx="0" cy="0"/>
           <a:chOff x="0" y="0"/>
           <a:chExt cx="0" cy="0"/>
         </a:xfrm>
-      </p:grpSpPr>
-      <p:sp>
-        <p:nvSpPr>
-          <p:cNvPr id="2" name="Slide Image Placeholder 1"/>
-          <p:cNvSpPr>
+      </ns0:grpSpPr>
+      <ns0:sp>
+        <ns0:nvSpPr>
+          <ns0:cNvPr id="2" name="Slide Image Placeholder 1"/>
+          <ns0:cNvSpPr>
             <a:spLocks noGrp="1" noRot="1" noChangeAspect="1"/>
-          </p:cNvSpPr>
-          <p:nvPr>
-            <p:ph type="sldImg"/>
-          </p:nvPr>
-        </p:nvSpPr>
-        <p:spPr/>
-      </p:sp>
-      <p:sp>
-        <p:nvSpPr>
-          <p:cNvPr id="3" name="Notes Placeholder 2"/>
-          <p:cNvSpPr>
+          </ns0:cNvSpPr>
+          <ns0:nvPr>
+            <ns0:ph type="sldImg"/>
+          </ns0:nvPr>
+        </ns0:nvSpPr>
+        <ns0:spPr/>
+      </ns0:sp>
+      <ns0:sp>
+        <ns0:nvSpPr>
+          <ns0:cNvPr id="3" name="Notes Placeholder 2"/>
+          <ns0:cNvSpPr>
             <a:spLocks noGrp="1"/>
-          </p:cNvSpPr>
-          <p:nvPr>
-            <p:ph type="body" idx="1"/>
-          </p:nvPr>
-        </p:nvSpPr>
-        <p:spPr/>
-        <p:txBody>
+          </ns0:cNvSpPr>
+          <ns0:nvPr>
+            <ns0:ph type="body" idx="1"/>
+          </ns0:nvPr>
+        </ns0:nvSpPr>
+        <ns0:spPr/>
+        <ns0:txBody>
           <a:bodyPr/>
           <a:lstStyle/>
           <a:p>
             <a:r>
               <a:rPr lang="en-US" dirty="0"/>
-              <a:t>1. Wann sind Vektoren orthogonal?
-Lösung: Wenn ihr Skalarprodukt 0 ist.
-2. Wie hängen Normalen- und Koordinatenform zusammen?
-Lösung: Normalenkomponenten sind die Koeffizienten der Koordinatenform.
-3. Wodurch wird der Winkel Gerade–Ebene berechnet?
-Lösung: Über Richtungsvektor der Geraden und Normalenvektor der Ebene.</a:t>
+              <a:t/>
             </a:r>
             <a:endParaRPr lang="en-US" dirty="0"/>
           </a:p>
-        </p:txBody>
-      </p:sp>
-      <p:sp>
-        <p:nvSpPr>
-          <p:cNvPr id="4" name="Slide Number Placeholder 3"/>
-          <p:cNvSpPr>
+        </ns0:txBody>
+      </ns0:sp>
+      <ns0:sp>
+        <ns0:nvSpPr>
+          <ns0:cNvPr id="4" name="Slide Number Placeholder 3"/>
+          <ns0:cNvSpPr>
             <a:spLocks noGrp="1"/>
-          </p:cNvSpPr>
-          <p:nvPr>
-            <p:ph type="sldNum" sz="quarter" idx="10"/>
-          </p:nvPr>
-        </p:nvSpPr>
-        <p:spPr/>
-        <p:txBody>
+          </ns0:cNvSpPr>
+          <ns0:nvPr>
+            <ns0:ph type="sldNum" sz="quarter" idx="10"/>
+          </ns0:nvPr>
+        </ns0:nvSpPr>
+        <ns0:spPr/>
+        <ns0:txBody>
           <a:bodyPr/>
           <a:lstStyle/>
           <a:p>
             <a:fld id="{F7021451-1387-4CA6-816F-3879F97B5CBC}" type="slidenum">
               <a:rPr lang="en-US"/>
-              <a:t>3</a:t>
+              <a:t/>
             </a:fld>
             <a:endParaRPr lang="en-US"/>
           </a:p>
-        </p:txBody>
-      </p:sp>
-    </p:spTree>
-    <p:extLst>
-      <p:ext uri="{BB962C8B-B14F-4D97-AF65-F5344CB8AC3E}">
-        <p14:creationId xmlns:p14="http://schemas.microsoft.com/office/powerpoint/2010/main" val="1024086991"/>
-      </p:ext>
-    </p:extLst>
-  </p:cSld>
-  <p:clrMapOvr>
+        </ns0:txBody>
+      </ns0:sp>
+    </ns0:spTree>
+    <ns0:extLst>
+      <ns0:ext uri="{BB962C8B-B14F-4D97-AF65-F5344CB8AC3E}">
+        <ns2:creationId val="1024086991"/>
+      </ns0:ext>
+    </ns0:extLst>
+  </ns0:cSld>
+  <ns0:clrMapOvr>
     <a:masterClrMapping/>
-  </p:clrMapOvr>
-</p:notes>
+  </ns0:clrMapOvr>
+</ns0:notes>
 </file>
 
 <file path=ppt/notesSlides/notesSlide4.xml><?xml version="1.0" encoding="utf-8"?>
-<p:notes xmlns:a="http://schemas.openxmlformats.org/drawingml/2006/main" xmlns:r="http://schemas.openxmlformats.org/officeDocument/2006/relationships" xmlns:p="http://schemas.openxmlformats.org/presentationml/2006/main">
-  <p:cSld>
-    <p:spTree>
-      <p:nvGrpSpPr>
-        <p:cNvPr id="1" name=""/>
-        <p:cNvGrpSpPr/>
-        <p:nvPr/>
-      </p:nvGrpSpPr>
-      <p:grpSpPr>
+<ns0:notes xmlns:a="http://schemas.openxmlformats.org/drawingml/2006/main" xmlns:ns0="http://schemas.openxmlformats.org/presentationml/2006/main" xmlns:ns2="http://schemas.microsoft.com/office/powerpoint/2010/main">
+  <ns0:cSld>
+    <ns0:spTree>
+      <ns0:nvGrpSpPr>
+        <ns0:cNvPr id="1" name=""/>
+        <ns0:cNvGrpSpPr/>
+        <ns0:nvPr/>
+      </ns0:nvGrpSpPr>
+      <ns0:grpSpPr>
         <a:xfrm>
           <a:off x="0" y="0"/>
           <a:ext cx="0" cy="0"/>
           <a:chOff x="0" y="0"/>
           <a:chExt cx="0" cy="0"/>
         </a:xfrm>
-      </p:grpSpPr>
-      <p:sp>
-        <p:nvSpPr>
-          <p:cNvPr id="2" name="Slide Image Placeholder 1"/>
-          <p:cNvSpPr>
+      </ns0:grpSpPr>
+      <ns0:sp>
+        <ns0:nvSpPr>
+          <ns0:cNvPr id="2" name="Slide Image Placeholder 1"/>
+          <ns0:cNvSpPr>
             <a:spLocks noGrp="1" noRot="1" noChangeAspect="1"/>
-          </p:cNvSpPr>
-          <p:nvPr>
-            <p:ph type="sldImg"/>
-          </p:nvPr>
-        </p:nvSpPr>
-        <p:spPr/>
-      </p:sp>
-      <p:sp>
-        <p:nvSpPr>
-          <p:cNvPr id="3" name="Notes Placeholder 2"/>
-          <p:cNvSpPr>
+          </ns0:cNvSpPr>
+          <ns0:nvPr>
+            <ns0:ph type="sldImg"/>
+          </ns0:nvPr>
+        </ns0:nvSpPr>
+        <ns0:spPr/>
+      </ns0:sp>
+      <ns0:sp>
+        <ns0:nvSpPr>
+          <ns0:cNvPr id="3" name="Notes Placeholder 2"/>
+          <ns0:cNvSpPr>
             <a:spLocks noGrp="1"/>
-          </p:cNvSpPr>
-          <p:nvPr>
-            <p:ph type="body" idx="1"/>
-          </p:nvPr>
-        </p:nvSpPr>
-        <p:spPr/>
-        <p:txBody>
+          </ns0:cNvSpPr>
+          <ns0:nvPr>
+            <ns0:ph type="body" idx="1"/>
+          </ns0:nvPr>
+        </ns0:nvSpPr>
+        <ns0:spPr/>
+        <ns0:txBody>
           <a:bodyPr/>
           <a:lstStyle/>
           <a:p>
             <a:r>
               <a:rPr lang="en-US" dirty="0"/>
-              <a:t>1. u=(1,0,0), v=(1,1,0): Winkel?
-Lösung: 45°.
-2. n=(2,−1,3), P(1|0|2): Normalenform?
-Lösung: (x−(1,0,2))·(2,−1,3)=0.
-3. g: x=(0,0,0)+t(1,1,1), E: x₁+x₂+x₃=6. Schnittparameter?
-Lösung: 3t=6 → t=2; S=(2,2,2).</a:t>
+              <a:t/>
             </a:r>
             <a:endParaRPr lang="en-US" dirty="0"/>
           </a:p>
-        </p:txBody>
-      </p:sp>
-      <p:sp>
-        <p:nvSpPr>
-          <p:cNvPr id="4" name="Slide Number Placeholder 3"/>
-          <p:cNvSpPr>
+        </ns0:txBody>
+      </ns0:sp>
+      <ns0:sp>
+        <ns0:nvSpPr>
+          <ns0:cNvPr id="4" name="Slide Number Placeholder 3"/>
+          <ns0:cNvSpPr>
             <a:spLocks noGrp="1"/>
-          </p:cNvSpPr>
-          <p:nvPr>
-            <p:ph type="sldNum" sz="quarter" idx="10"/>
-          </p:nvPr>
-        </p:nvSpPr>
-        <p:spPr/>
-        <p:txBody>
+          </ns0:cNvSpPr>
+          <ns0:nvPr>
+            <ns0:ph type="sldNum" sz="quarter" idx="10"/>
+          </ns0:nvPr>
+        </ns0:nvSpPr>
+        <ns0:spPr/>
+        <ns0:txBody>
           <a:bodyPr/>
           <a:lstStyle/>
           <a:p>
             <a:fld id="{F7021451-1387-4CA6-816F-3879F97B5CBC}" type="slidenum">
               <a:rPr lang="en-US"/>
-              <a:t>4</a:t>
+              <a:t/>
             </a:fld>
             <a:endParaRPr lang="en-US"/>
           </a:p>
-        </p:txBody>
-      </p:sp>
-    </p:spTree>
-    <p:extLst>
-      <p:ext uri="{BB962C8B-B14F-4D97-AF65-F5344CB8AC3E}">
-        <p14:creationId xmlns:p14="http://schemas.microsoft.com/office/powerpoint/2010/main" val="1024086991"/>
-      </p:ext>
-    </p:extLst>
-  </p:cSld>
-  <p:clrMapOvr>
+        </ns0:txBody>
+      </ns0:sp>
+    </ns0:spTree>
+    <ns0:extLst>
+      <ns0:ext uri="{BB962C8B-B14F-4D97-AF65-F5344CB8AC3E}">
+        <ns2:creationId val="1024086991"/>
+      </ns0:ext>
+    </ns0:extLst>
+  </ns0:cSld>
+  <ns0:clrMapOvr>
     <a:masterClrMapping/>
-  </p:clrMapOvr>
-</p:notes>
+  </ns0:clrMapOvr>
+</ns0:notes>
 </file>
 
 <file path=ppt/notesSlides/notesSlide5.xml><?xml version="1.0" encoding="utf-8"?>
-<p:notes xmlns:a="http://schemas.openxmlformats.org/drawingml/2006/main" xmlns:r="http://schemas.openxmlformats.org/officeDocument/2006/relationships" xmlns:p="http://schemas.openxmlformats.org/presentationml/2006/main">
-  <p:cSld>
-    <p:spTree>
-      <p:nvGrpSpPr>
-        <p:cNvPr id="1" name=""/>
-        <p:cNvGrpSpPr/>
-        <p:nvPr/>
-      </p:nvGrpSpPr>
-      <p:grpSpPr>
+<ns0:notes xmlns:a="http://schemas.openxmlformats.org/drawingml/2006/main" xmlns:ns0="http://schemas.openxmlformats.org/presentationml/2006/main" xmlns:ns2="http://schemas.microsoft.com/office/powerpoint/2010/main">
+  <ns0:cSld>
+    <ns0:spTree>
+      <ns0:nvGrpSpPr>
+        <ns0:cNvPr id="1" name=""/>
+        <ns0:cNvGrpSpPr/>
+        <ns0:nvPr/>
+      </ns0:nvGrpSpPr>
+      <ns0:grpSpPr>
         <a:xfrm>
           <a:off x="0" y="0"/>
           <a:ext cx="0" cy="0"/>
           <a:chOff x="0" y="0"/>
           <a:chExt cx="0" cy="0"/>
         </a:xfrm>
-      </p:grpSpPr>
-      <p:sp>
-        <p:nvSpPr>
-          <p:cNvPr id="2" name="Slide Image Placeholder 1"/>
-          <p:cNvSpPr>
+      </ns0:grpSpPr>
+      <ns0:sp>
+        <ns0:nvSpPr>
+          <ns0:cNvPr id="2" name="Slide Image Placeholder 1"/>
+          <ns0:cNvSpPr>
             <a:spLocks noGrp="1" noRot="1" noChangeAspect="1"/>
-          </p:cNvSpPr>
-          <p:nvPr>
-            <p:ph type="sldImg"/>
-          </p:nvPr>
-        </p:nvSpPr>
-        <p:spPr/>
-      </p:sp>
-      <p:sp>
-        <p:nvSpPr>
-          <p:cNvPr id="3" name="Notes Placeholder 2"/>
-          <p:cNvSpPr>
+          </ns0:cNvSpPr>
+          <ns0:nvPr>
+            <ns0:ph type="sldImg"/>
+          </ns0:nvPr>
+        </ns0:nvSpPr>
+        <ns0:spPr/>
+      </ns0:sp>
+      <ns0:sp>
+        <ns0:nvSpPr>
+          <ns0:cNvPr id="3" name="Notes Placeholder 2"/>
+          <ns0:cNvSpPr>
             <a:spLocks noGrp="1"/>
-          </p:cNvSpPr>
-          <p:nvPr>
-            <p:ph type="body" idx="1"/>
-          </p:nvPr>
-        </p:nvSpPr>
-        <p:spPr/>
-        <p:txBody>
+          </ns0:cNvSpPr>
+          <ns0:nvPr>
+            <ns0:ph type="body" idx="1"/>
+          </ns0:nvPr>
+        </ns0:nvSpPr>
+        <ns0:spPr/>
+        <ns0:txBody>
           <a:bodyPr/>
           <a:lstStyle/>
           <a:p>
             <a:r>
               <a:rPr lang="en-US" dirty="0"/>
-              <a:t>1. Wie hängen Normalen- und Koordinatenform zusammen?
-Lösung: Normalenkomponenten sind die Koeffizienten der Koordinatenform.
-2. g: x=(0,0,0)+t(1,1,1), E: x₁+x₂+x₃=6. Schnittparameter?
-Lösung: 3t=6 → t=2; S=(2,2,2).</a:t>
+              <a:t/>
             </a:r>
             <a:endParaRPr lang="en-US" dirty="0"/>
           </a:p>
-        </p:txBody>
-      </p:sp>
-      <p:sp>
-        <p:nvSpPr>
-          <p:cNvPr id="4" name="Slide Number Placeholder 3"/>
-          <p:cNvSpPr>
+        </ns0:txBody>
+      </ns0:sp>
+      <ns0:sp>
+        <ns0:nvSpPr>
+          <ns0:cNvPr id="4" name="Slide Number Placeholder 3"/>
+          <ns0:cNvSpPr>
             <a:spLocks noGrp="1"/>
-          </p:cNvSpPr>
-          <p:nvPr>
-            <p:ph type="sldNum" sz="quarter" idx="10"/>
-          </p:nvPr>
-        </p:nvSpPr>
-        <p:spPr/>
-        <p:txBody>
+          </ns0:cNvSpPr>
+          <ns0:nvPr>
+            <ns0:ph type="sldNum" sz="quarter" idx="10"/>
+          </ns0:nvPr>
+        </ns0:nvSpPr>
+        <ns0:spPr/>
+        <ns0:txBody>
           <a:bodyPr/>
           <a:lstStyle/>
           <a:p>
             <a:fld id="{F7021451-1387-4CA6-816F-3879F97B5CBC}" type="slidenum">
               <a:rPr lang="en-US"/>
-              <a:t>5</a:t>
+              <a:t/>
             </a:fld>
             <a:endParaRPr lang="en-US"/>
           </a:p>
-        </p:txBody>
-      </p:sp>
-    </p:spTree>
-    <p:extLst>
-      <p:ext uri="{BB962C8B-B14F-4D97-AF65-F5344CB8AC3E}">
-        <p14:creationId xmlns:p14="http://schemas.microsoft.com/office/powerpoint/2010/main" val="1024086991"/>
-      </p:ext>
-    </p:extLst>
-  </p:cSld>
-  <p:clrMapOvr>
+        </ns0:txBody>
+      </ns0:sp>
+    </ns0:spTree>
+    <ns0:extLst>
+      <ns0:ext uri="{BB962C8B-B14F-4D97-AF65-F5344CB8AC3E}">
+        <ns2:creationId val="1024086991"/>
+      </ns0:ext>
+    </ns0:extLst>
+  </ns0:cSld>
+  <ns0:clrMapOvr>
     <a:masterClrMapping/>
-  </p:clrMapOvr>
-</p:notes>
+  </ns0:clrMapOvr>
+</ns0:notes>
 </file>
 
 <file path=ppt/notesSlides/notesSlide6.xml><?xml version="1.0" encoding="utf-8"?>
-<p:notes xmlns:a="http://schemas.openxmlformats.org/drawingml/2006/main" xmlns:r="http://schemas.openxmlformats.org/officeDocument/2006/relationships" xmlns:p="http://schemas.openxmlformats.org/presentationml/2006/main">
-  <p:cSld>
-    <p:spTree>
-      <p:nvGrpSpPr>
-        <p:cNvPr id="1" name=""/>
-        <p:cNvGrpSpPr/>
-        <p:nvPr/>
-      </p:nvGrpSpPr>
-      <p:grpSpPr>
+<ns0:notes xmlns:a="http://schemas.openxmlformats.org/drawingml/2006/main" xmlns:ns0="http://schemas.openxmlformats.org/presentationml/2006/main" xmlns:ns2="http://schemas.microsoft.com/office/powerpoint/2010/main">
+  <ns0:cSld>
+    <ns0:spTree>
+      <ns0:nvGrpSpPr>
+        <ns0:cNvPr id="1" name=""/>
+        <ns0:cNvGrpSpPr/>
+        <ns0:nvPr/>
+      </ns0:nvGrpSpPr>
+      <ns0:grpSpPr>
         <a:xfrm>
           <a:off x="0" y="0"/>
           <a:ext cx="0" cy="0"/>
           <a:chOff x="0" y="0"/>
           <a:chExt cx="0" cy="0"/>
         </a:xfrm>
-      </p:grpSpPr>
-      <p:sp>
-        <p:nvSpPr>
-          <p:cNvPr id="2" name="Slide Image Placeholder 1"/>
-          <p:cNvSpPr>
+      </ns0:grpSpPr>
+      <ns0:sp>
+        <ns0:nvSpPr>
+          <ns0:cNvPr id="2" name="Slide Image Placeholder 1"/>
+          <ns0:cNvSpPr>
             <a:spLocks noGrp="1" noRot="1" noChangeAspect="1"/>
-          </p:cNvSpPr>
-          <p:nvPr>
-            <p:ph type="sldImg"/>
-          </p:nvPr>
-        </p:nvSpPr>
-        <p:spPr/>
-      </p:sp>
-      <p:sp>
-        <p:nvSpPr>
-          <p:cNvPr id="3" name="Notes Placeholder 2"/>
-          <p:cNvSpPr>
+          </ns0:cNvSpPr>
+          <ns0:nvPr>
+            <ns0:ph type="sldImg"/>
+          </ns0:nvPr>
+        </ns0:nvSpPr>
+        <ns0:spPr/>
+      </ns0:sp>
+      <ns0:sp>
+        <ns0:nvSpPr>
+          <ns0:cNvPr id="3" name="Notes Placeholder 2"/>
+          <ns0:cNvSpPr>
             <a:spLocks noGrp="1"/>
-          </p:cNvSpPr>
-          <p:nvPr>
-            <p:ph type="body" idx="1"/>
-          </p:nvPr>
-        </p:nvSpPr>
-        <p:spPr/>
-        <p:txBody>
+          </ns0:cNvSpPr>
+          <ns0:nvPr>
+            <ns0:ph type="body" idx="1"/>
+          </ns0:nvPr>
+        </ns0:nvSpPr>
+        <ns0:spPr/>
+        <ns0:txBody>
           <a:bodyPr/>
           <a:lstStyle/>
           <a:p>
             <a:r>
               <a:rPr lang="en-US" dirty="0"/>
-              <a:t>1. P(1|2|3), E: z=0. Abstand?
-Lösung: 3.
-2. Interpretiere die Zeile 0x+0y+0z=5.
-Lösung: Widerspruch → keine Lösung.</a:t>
+              <a:t/>
             </a:r>
             <a:endParaRPr lang="en-US" dirty="0"/>
           </a:p>
-        </p:txBody>
-      </p:sp>
-      <p:sp>
-        <p:nvSpPr>
-          <p:cNvPr id="4" name="Slide Number Placeholder 3"/>
-          <p:cNvSpPr>
+        </ns0:txBody>
+      </ns0:sp>
+      <ns0:sp>
+        <ns0:nvSpPr>
+          <ns0:cNvPr id="4" name="Slide Number Placeholder 3"/>
+          <ns0:cNvSpPr>
             <a:spLocks noGrp="1"/>
-          </p:cNvSpPr>
-          <p:nvPr>
-            <p:ph type="sldNum" sz="quarter" idx="10"/>
-          </p:nvPr>
-        </p:nvSpPr>
-        <p:spPr/>
-        <p:txBody>
+          </ns0:cNvSpPr>
+          <ns0:nvPr>
+            <ns0:ph type="sldNum" sz="quarter" idx="10"/>
+          </ns0:nvPr>
+        </ns0:nvSpPr>
+        <ns0:spPr/>
+        <ns0:txBody>
           <a:bodyPr/>
           <a:lstStyle/>
           <a:p>
             <a:fld id="{F7021451-1387-4CA6-816F-3879F97B5CBC}" type="slidenum">
               <a:rPr lang="en-US"/>
-              <a:t>6</a:t>
+              <a:t/>
             </a:fld>
             <a:endParaRPr lang="en-US"/>
           </a:p>
-        </p:txBody>
-      </p:sp>
-    </p:spTree>
-    <p:extLst>
-      <p:ext uri="{BB962C8B-B14F-4D97-AF65-F5344CB8AC3E}">
-        <p14:creationId xmlns:p14="http://schemas.microsoft.com/office/powerpoint/2010/main" val="1024086991"/>
-      </p:ext>
-    </p:extLst>
-  </p:cSld>
-  <p:clrMapOvr>
+        </ns0:txBody>
+      </ns0:sp>
+    </ns0:spTree>
+    <ns0:extLst>
+      <ns0:ext uri="{BB962C8B-B14F-4D97-AF65-F5344CB8AC3E}">
+        <ns2:creationId val="1024086991"/>
+      </ns0:ext>
+    </ns0:extLst>
+  </ns0:cSld>
+  <ns0:clrMapOvr>
     <a:masterClrMapping/>
-  </p:clrMapOvr>
-</p:notes>
+  </ns0:clrMapOvr>
+</ns0:notes>
 </file>
 
 <file path=ppt/notesSlides/notesSlide7.xml><?xml version="1.0" encoding="utf-8"?>
-<p:notes xmlns:a="http://schemas.openxmlformats.org/drawingml/2006/main" xmlns:r="http://schemas.openxmlformats.org/officeDocument/2006/relationships" xmlns:p="http://schemas.openxmlformats.org/presentationml/2006/main">
-  <p:cSld>
-    <p:spTree>
-      <p:nvGrpSpPr>
-        <p:cNvPr id="1" name=""/>
-        <p:cNvGrpSpPr/>
-        <p:nvPr/>
-      </p:nvGrpSpPr>
-      <p:grpSpPr>
+<ns0:notes xmlns:a="http://schemas.openxmlformats.org/drawingml/2006/main" xmlns:ns0="http://schemas.openxmlformats.org/presentationml/2006/main" xmlns:ns2="http://schemas.microsoft.com/office/powerpoint/2010/main">
+  <ns0:cSld>
+    <ns0:spTree>
+      <ns0:nvGrpSpPr>
+        <ns0:cNvPr id="1" name=""/>
+        <ns0:cNvGrpSpPr/>
+        <ns0:nvPr/>
+      </ns0:nvGrpSpPr>
+      <ns0:grpSpPr>
         <a:xfrm>
           <a:off x="0" y="0"/>
           <a:ext cx="0" cy="0"/>
           <a:chOff x="0" y="0"/>
           <a:chExt cx="0" cy="0"/>
         </a:xfrm>
-      </p:grpSpPr>
-      <p:sp>
-        <p:nvSpPr>
-          <p:cNvPr id="2" name="Slide Image Placeholder 1"/>
-          <p:cNvSpPr>
+      </ns0:grpSpPr>
+      <ns0:sp>
+        <ns0:nvSpPr>
+          <ns0:cNvPr id="2" name="Slide Image Placeholder 1"/>
+          <ns0:cNvSpPr>
             <a:spLocks noGrp="1" noRot="1" noChangeAspect="1"/>
-          </p:cNvSpPr>
-          <p:nvPr>
-            <p:ph type="sldImg"/>
-          </p:nvPr>
-        </p:nvSpPr>
-        <p:spPr/>
-      </p:sp>
-      <p:sp>
-        <p:nvSpPr>
-          <p:cNvPr id="3" name="Notes Placeholder 2"/>
-          <p:cNvSpPr>
+          </ns0:cNvSpPr>
+          <ns0:nvPr>
+            <ns0:ph type="sldImg"/>
+          </ns0:nvPr>
+        </ns0:nvSpPr>
+        <ns0:spPr/>
+      </ns0:sp>
+      <ns0:sp>
+        <ns0:nvSpPr>
+          <ns0:cNvPr id="3" name="Notes Placeholder 2"/>
+          <ns0:cNvSpPr>
             <a:spLocks noGrp="1"/>
-          </p:cNvSpPr>
-          <p:nvPr>
-            <p:ph type="body" idx="1"/>
-          </p:nvPr>
-        </p:nvSpPr>
-        <p:spPr/>
-        <p:txBody>
+          </ns0:cNvSpPr>
+          <ns0:nvPr>
+            <ns0:ph type="body" idx="1"/>
+          </ns0:nvPr>
+        </ns0:nvSpPr>
+        <ns0:spPr/>
+        <ns0:txBody>
           <a:bodyPr/>
           <a:lstStyle/>
           <a:p>
             <a:r>
               <a:rPr lang="en-US" dirty="0"/>
-              <a:t>1. Warum braucht die Winkelberechnung die Vektorlängen?
-Lösung: Das Skalarprodukt enthält auch die Größen; Normierung trennt Richtung und Länge.
-2. Wie kann die Lösungsmenge eines LGS geometrisch gedeutet werden?
-Lösung: Als Schnittmenge von Geraden/Ebenen je nach Dimension.
-3. „Was in der Zeichnung gleich aussieht, ist bewiesen gleich.“ – Korrigiere.
-Lösung: Eine Zeichnung liefert Hinweise, aber Gleichheit muss über Voraussetzungen/Sätze begründet werden.</a:t>
+              <a:t/>
             </a:r>
             <a:endParaRPr lang="en-US" dirty="0"/>
           </a:p>
-        </p:txBody>
-      </p:sp>
-      <p:sp>
-        <p:nvSpPr>
-          <p:cNvPr id="4" name="Slide Number Placeholder 3"/>
-          <p:cNvSpPr>
+        </ns0:txBody>
+      </ns0:sp>
+      <ns0:sp>
+        <ns0:nvSpPr>
+          <ns0:cNvPr id="4" name="Slide Number Placeholder 3"/>
+          <ns0:cNvSpPr>
             <a:spLocks noGrp="1"/>
-          </p:cNvSpPr>
-          <p:nvPr>
-            <p:ph type="sldNum" sz="quarter" idx="10"/>
-          </p:nvPr>
-        </p:nvSpPr>
-        <p:spPr/>
-        <p:txBody>
+          </ns0:cNvSpPr>
+          <ns0:nvPr>
+            <ns0:ph type="sldNum" sz="quarter" idx="10"/>
+          </ns0:nvPr>
+        </ns0:nvSpPr>
+        <ns0:spPr/>
+        <ns0:txBody>
           <a:bodyPr/>
           <a:lstStyle/>
           <a:p>
             <a:fld id="{F7021451-1387-4CA6-816F-3879F97B5CBC}" type="slidenum">
               <a:rPr lang="en-US"/>
-              <a:t>7</a:t>
+              <a:t/>
             </a:fld>
             <a:endParaRPr lang="en-US"/>
           </a:p>
-        </p:txBody>
-      </p:sp>
-    </p:spTree>
-    <p:extLst>
-      <p:ext uri="{BB962C8B-B14F-4D97-AF65-F5344CB8AC3E}">
-        <p14:creationId xmlns:p14="http://schemas.microsoft.com/office/powerpoint/2010/main" val="1024086991"/>
-      </p:ext>
-    </p:extLst>
-  </p:cSld>
-  <p:clrMapOvr>
+        </ns0:txBody>
+      </ns0:sp>
+    </ns0:spTree>
+    <ns0:extLst>
+      <ns0:ext uri="{BB962C8B-B14F-4D97-AF65-F5344CB8AC3E}">
+        <ns2:creationId val="1024086991"/>
+      </ns0:ext>
+    </ns0:extLst>
+  </ns0:cSld>
+  <ns0:clrMapOvr>
     <a:masterClrMapping/>
-  </p:clrMapOvr>
-</p:notes>
+  </ns0:clrMapOvr>
+</ns0:notes>
 </file>
 
 <file path=ppt/notesSlides/notesSlide8.xml><?xml version="1.0" encoding="utf-8"?>
-<p:notes xmlns:a="http://schemas.openxmlformats.org/drawingml/2006/main" xmlns:r="http://schemas.openxmlformats.org/officeDocument/2006/relationships" xmlns:p="http://schemas.openxmlformats.org/presentationml/2006/main">
-  <p:cSld>
-    <p:spTree>
-      <p:nvGrpSpPr>
-        <p:cNvPr id="1" name=""/>
-        <p:cNvGrpSpPr/>
-        <p:nvPr/>
-      </p:nvGrpSpPr>
-      <p:grpSpPr>
+<ns0:notes xmlns:a="http://schemas.openxmlformats.org/drawingml/2006/main" xmlns:ns0="http://schemas.openxmlformats.org/presentationml/2006/main" xmlns:ns2="http://schemas.microsoft.com/office/powerpoint/2010/main">
+  <ns0:cSld>
+    <ns0:spTree>
+      <ns0:nvGrpSpPr>
+        <ns0:cNvPr id="1" name=""/>
+        <ns0:cNvGrpSpPr/>
+        <ns0:nvPr/>
+      </ns0:nvGrpSpPr>
+      <ns0:grpSpPr>
         <a:xfrm>
           <a:off x="0" y="0"/>
           <a:ext cx="0" cy="0"/>
           <a:chOff x="0" y="0"/>
           <a:chExt cx="0" cy="0"/>
         </a:xfrm>
-      </p:grpSpPr>
-      <p:sp>
-        <p:nvSpPr>
-          <p:cNvPr id="2" name="Slide Image Placeholder 1"/>
-          <p:cNvSpPr>
+      </ns0:grpSpPr>
+      <ns0:sp>
+        <ns0:nvSpPr>
+          <ns0:cNvPr id="2" name="Slide Image Placeholder 1"/>
+          <ns0:cNvSpPr>
             <a:spLocks noGrp="1" noRot="1" noChangeAspect="1"/>
-          </p:cNvSpPr>
-          <p:nvPr>
-            <p:ph type="sldImg"/>
-          </p:nvPr>
-        </p:nvSpPr>
-        <p:spPr/>
-      </p:sp>
-      <p:sp>
-        <p:nvSpPr>
-          <p:cNvPr id="3" name="Notes Placeholder 2"/>
-          <p:cNvSpPr>
+          </ns0:cNvSpPr>
+          <ns0:nvPr>
+            <ns0:ph type="sldImg"/>
+          </ns0:nvPr>
+        </ns0:nvSpPr>
+        <ns0:spPr/>
+      </ns0:sp>
+      <ns0:sp>
+        <ns0:nvSpPr>
+          <ns0:cNvPr id="3" name="Notes Placeholder 2"/>
+          <ns0:cNvSpPr>
             <a:spLocks noGrp="1"/>
-          </p:cNvSpPr>
-          <p:nvPr>
-            <p:ph type="body" idx="1"/>
-          </p:nvPr>
-        </p:nvSpPr>
-        <p:spPr/>
-        <p:txBody>
+          </ns0:cNvSpPr>
+          <ns0:nvPr>
+            <ns0:ph type="body" idx="1"/>
+          </ns0:nvPr>
+        </ns0:nvSpPr>
+        <ns0:spPr/>
+        <ns0:txBody>
           <a:bodyPr/>
           <a:lstStyle/>
           <a:p>
             <a:r>
               <a:rPr lang="en-US" dirty="0"/>
-              <a:t>1. Berechnen Sie den Winkel zwischen u=(1|0|0) und v=(1|1|0).
-Lösung: cos(α)=1/√2 ⇒ α=45°.
-2. Bestimmen Sie eine Ebenengleichung durch P(1|2|3) mit Normalenvektor n=(0|0|1).
-Lösung: E: x₃=3 bzw. z=3.
-3. Ermitteln Sie den Abstand von P(1|2|3) zur Ebene E: z=0.
-Lösung: Der Abstand beträgt 3.
-4. Weisen Sie nach, dass g mit Richtungsvektor (1|1|1) senkrecht auf E: x₁+x₂+x₃=3 steht.
-Lösung: Der Richtungsvektor von g ist parallel zum Normalenvektor n=(1|1|1) der Ebene.
-5. Beurteilen Sie die Aussage: „Zwei Geraden im Raum mit nicht parallelen Richtungsvektoren schneiden sich immer.“
-Lösung: Falsch. Nicht parallele Geraden können windschief sein.</a:t>
+              <a:t/>
             </a:r>
             <a:endParaRPr lang="en-US" dirty="0"/>
           </a:p>
-        </p:txBody>
-      </p:sp>
-      <p:sp>
-        <p:nvSpPr>
-          <p:cNvPr id="4" name="Slide Number Placeholder 3"/>
-          <p:cNvSpPr>
+        </ns0:txBody>
+      </ns0:sp>
+      <ns0:sp>
+        <ns0:nvSpPr>
+          <ns0:cNvPr id="4" name="Slide Number Placeholder 3"/>
+          <ns0:cNvSpPr>
             <a:spLocks noGrp="1"/>
-          </p:cNvSpPr>
-          <p:nvPr>
-            <p:ph type="sldNum" sz="quarter" idx="10"/>
-          </p:nvPr>
-        </p:nvSpPr>
-        <p:spPr/>
-        <p:txBody>
+          </ns0:cNvSpPr>
+          <ns0:nvPr>
+            <ns0:ph type="sldNum" sz="quarter" idx="10"/>
+          </ns0:nvPr>
+        </ns0:nvSpPr>
+        <ns0:spPr/>
+        <ns0:txBody>
           <a:bodyPr/>
           <a:lstStyle/>
           <a:p>
             <a:fld id="{F7021451-1387-4CA6-816F-3879F97B5CBC}" type="slidenum">
               <a:rPr lang="en-US"/>
-              <a:t>8</a:t>
+              <a:t/>
             </a:fld>
             <a:endParaRPr lang="en-US"/>
           </a:p>
-        </p:txBody>
-      </p:sp>
-    </p:spTree>
-    <p:extLst>
-      <p:ext uri="{BB962C8B-B14F-4D97-AF65-F5344CB8AC3E}">
-        <p14:creationId xmlns:p14="http://schemas.microsoft.com/office/powerpoint/2010/main" val="1024086991"/>
-      </p:ext>
-    </p:extLst>
-  </p:cSld>
-  <p:clrMapOvr>
+        </ns0:txBody>
+      </ns0:sp>
+    </ns0:spTree>
+    <ns0:extLst>
+      <ns0:ext uri="{BB962C8B-B14F-4D97-AF65-F5344CB8AC3E}">
+        <ns2:creationId val="1024086991"/>
+      </ns0:ext>
+    </ns0:extLst>
+  </ns0:cSld>
+  <ns0:clrMapOvr>
     <a:masterClrMapping/>
-  </p:clrMapOvr>
-</p:notes>
+  </ns0:clrMapOvr>
+</ns0:notes>
 </file>
 
 <file path=ppt/slideLayouts/slideLayout1.xml><?xml version="1.0" encoding="utf-8"?>
@@ -2765,29 +2726,29 @@
 </file>
 
 <file path=ppt/slides/slide2.xml><?xml version="1.0" encoding="utf-8"?>
-<p:sld xmlns:a="http://schemas.openxmlformats.org/drawingml/2006/main" xmlns:r="http://schemas.openxmlformats.org/officeDocument/2006/relationships" xmlns:p="http://schemas.openxmlformats.org/presentationml/2006/main">
-  <p:cSld name="Slide 2">
-    <p:spTree>
-      <p:nvGrpSpPr>
-        <p:cNvPr id="1" name=""/>
-        <p:cNvGrpSpPr/>
-        <p:nvPr/>
-      </p:nvGrpSpPr>
-      <p:grpSpPr>
+<ns0:sld xmlns:a="http://schemas.openxmlformats.org/drawingml/2006/main" xmlns:ns0="http://schemas.openxmlformats.org/presentationml/2006/main" xmlns:ns2="http://schemas.microsoft.com/office/mac/drawingml/2011/main">
+  <ns0:cSld name="Slide 2">
+    <ns0:spTree>
+      <ns0:nvGrpSpPr>
+        <ns0:cNvPr id="1" name=""/>
+        <ns0:cNvGrpSpPr/>
+        <ns0:nvPr/>
+      </ns0:nvGrpSpPr>
+      <ns0:grpSpPr>
         <a:xfrm>
           <a:off x="0" y="0"/>
           <a:ext cx="0" cy="0"/>
           <a:chOff x="0" y="0"/>
           <a:chExt cx="0" cy="0"/>
         </a:xfrm>
-      </p:grpSpPr>
-      <p:sp>
-        <p:nvSpPr>
-          <p:cNvPr id="2" name="Text 0"/>
-          <p:cNvSpPr/>
-          <p:nvPr/>
-        </p:nvSpPr>
-        <p:spPr>
+      </ns0:grpSpPr>
+      <ns0:sp>
+        <ns0:nvSpPr>
+          <ns0:cNvPr id="2" name="Text 0"/>
+          <ns0:cNvSpPr/>
+          <ns0:nvPr/>
+        </ns0:nvSpPr>
+        <ns0:spPr>
           <a:xfrm>
             <a:off x="658368" y="658368"/>
             <a:ext cx="9784080" cy="475488"/>
@@ -2797,8 +2758,8 @@
           </a:prstGeom>
           <a:noFill/>
           <a:ln/>
-        </p:spPr>
-        <p:txBody>
+        </ns0:spPr>
+        <ns0:txBody>
           <a:bodyPr wrap="square" lIns="508" tIns="508" rIns="508" bIns="508" rtlCol="0" anchor="ctr">
             <a:normAutofit/>
           </a:bodyPr>
@@ -2820,15 +2781,15 @@
             </a:r>
             <a:endParaRPr lang="en-US" sz="2600" dirty="0"/>
           </a:p>
-        </p:txBody>
-      </p:sp>
-      <p:sp>
-        <p:nvSpPr>
-          <p:cNvPr id="3" name="Shape 1"/>
-          <p:cNvSpPr/>
-          <p:nvPr/>
-        </p:nvSpPr>
-        <p:spPr>
+        </ns0:txBody>
+      </ns0:sp>
+      <ns0:sp>
+        <ns0:nvSpPr>
+          <ns0:cNvPr id="3" name="Shape 1"/>
+          <ns0:cNvSpPr/>
+          <ns0:nvPr/>
+        </ns0:nvSpPr>
+        <ns0:spPr>
           <a:xfrm>
             <a:off x="10744200" y="694944"/>
             <a:ext cx="685800" cy="109728"/>
@@ -2845,15 +2806,15 @@
             </a:solidFill>
             <a:prstDash val="solid"/>
           </a:ln>
-        </p:spPr>
-      </p:sp>
-      <p:sp>
-        <p:nvSpPr>
-          <p:cNvPr id="4" name="Text 2"/>
-          <p:cNvSpPr/>
-          <p:nvPr/>
-        </p:nvSpPr>
-        <p:spPr>
+        </ns0:spPr>
+      </ns0:sp>
+      <ns0:sp>
+        <ns0:nvSpPr>
+          <ns0:cNvPr id="4" name="Text 2"/>
+          <ns0:cNvSpPr/>
+          <ns0:nvPr/>
+        </ns0:nvSpPr>
+        <ns0:spPr>
           <a:xfrm>
             <a:off x="676656" y="1152144"/>
             <a:ext cx="7772400" cy="256032"/>
@@ -2863,8 +2824,8 @@
           </a:prstGeom>
           <a:noFill/>
           <a:ln/>
-        </p:spPr>
-        <p:txBody>
+        </ns0:spPr>
+        <ns0:txBody>
           <a:bodyPr wrap="square" lIns="508" tIns="508" rIns="508" bIns="508" rtlCol="0" anchor="ctr">
             <a:normAutofit/>
           </a:bodyPr>
@@ -2886,15 +2847,15 @@
             </a:r>
             <a:endParaRPr lang="en-US" sz="1150" dirty="0"/>
           </a:p>
-        </p:txBody>
-      </p:sp>
-      <p:sp>
-        <p:nvSpPr>
-          <p:cNvPr id="5" name="Shape 3"/>
-          <p:cNvSpPr/>
-          <p:nvPr/>
-        </p:nvSpPr>
-        <p:spPr>
+        </ns0:txBody>
+      </ns0:sp>
+      <ns0:sp>
+        <ns0:nvSpPr>
+          <ns0:cNvPr id="5" name="Shape 3"/>
+          <ns0:cNvSpPr/>
+          <ns0:nvPr/>
+        </ns0:nvSpPr>
+        <ns0:spPr>
           <a:xfrm>
             <a:off x="731520" y="1600200"/>
             <a:ext cx="5257800" cy="1600200"/>
@@ -2920,15 +2881,15 @@
               </a:srgbClr>
             </a:outerShdw>
           </a:effectLst>
-        </p:spPr>
-      </p:sp>
-      <p:sp>
-        <p:nvSpPr>
-          <p:cNvPr id="6" name="Shape 4"/>
-          <p:cNvSpPr/>
-          <p:nvPr/>
-        </p:nvSpPr>
-        <p:spPr>
+        </ns0:spPr>
+      </ns0:sp>
+      <ns0:sp>
+        <ns0:nvSpPr>
+          <ns0:cNvPr id="6" name="Shape 4"/>
+          <ns0:cNvSpPr/>
+          <ns0:nvPr/>
+        </ns0:nvSpPr>
+        <ns0:spPr>
           <a:xfrm>
             <a:off x="896112" y="1764792"/>
             <a:ext cx="438912" cy="438912"/>
@@ -2945,15 +2906,15 @@
             </a:solidFill>
             <a:prstDash val="solid"/>
           </a:ln>
-        </p:spPr>
-      </p:sp>
-      <p:sp>
-        <p:nvSpPr>
-          <p:cNvPr id="7" name="Text 5"/>
-          <p:cNvSpPr/>
-          <p:nvPr/>
-        </p:nvSpPr>
-        <p:spPr>
+        </ns0:spPr>
+      </ns0:sp>
+      <ns0:sp>
+        <ns0:nvSpPr>
+          <ns0:cNvPr id="7" name="Text 5"/>
+          <ns0:cNvSpPr/>
+          <ns0:nvPr/>
+        </ns0:nvSpPr>
+        <ns0:spPr>
           <a:xfrm>
             <a:off x="896112" y="1764792"/>
             <a:ext cx="438912" cy="438912"/>
@@ -2963,8 +2924,8 @@
           </a:prstGeom>
           <a:noFill/>
           <a:ln/>
-        </p:spPr>
-        <p:txBody>
+        </ns0:spPr>
+        <ns0:txBody>
           <a:bodyPr wrap="square" lIns="508" tIns="508" rIns="508" bIns="508" rtlCol="0" anchor="ctr">
             <a:normAutofit/>
           </a:bodyPr>
@@ -2986,15 +2947,15 @@
             </a:r>
             <a:endParaRPr lang="en-US" sz="1300" dirty="0"/>
           </a:p>
-        </p:txBody>
-      </p:sp>
-      <p:sp>
-        <p:nvSpPr>
-          <p:cNvPr id="8" name="Text 6"/>
-          <p:cNvSpPr/>
-          <p:nvPr/>
-        </p:nvSpPr>
-        <p:spPr>
+        </ns0:txBody>
+      </ns0:sp>
+      <ns0:sp>
+        <ns0:nvSpPr>
+          <ns0:cNvPr id="8" name="Text 6"/>
+          <ns0:cNvSpPr/>
+          <ns0:nvPr/>
+        </ns0:nvSpPr>
+        <ns0:spPr>
           <a:xfrm>
             <a:off x="1463040" y="1755648"/>
             <a:ext cx="4361688" cy="1344168"/>
@@ -3004,8 +2965,8 @@
           </a:prstGeom>
           <a:noFill/>
           <a:ln/>
-        </p:spPr>
-        <p:txBody>
+        </ns0:spPr>
+        <ns0:txBody>
           <a:bodyPr wrap="square" lIns="508" tIns="508" rIns="508" bIns="508" rtlCol="0" anchor="ctr">
             <a:normAutofit/>
           </a:bodyPr>
@@ -3027,15 +2988,15 @@
             </a:r>
             <a:endParaRPr lang="en-US" sz="1650" dirty="0"/>
           </a:p>
-        </p:txBody>
-      </p:sp>
-      <p:sp>
-        <p:nvSpPr>
-          <p:cNvPr id="9" name="Shape 7"/>
-          <p:cNvSpPr/>
-          <p:nvPr/>
-        </p:nvSpPr>
-        <p:spPr>
+        </ns0:txBody>
+      </ns0:sp>
+      <ns0:sp>
+        <ns0:nvSpPr>
+          <ns0:cNvPr id="9" name="Shape 7"/>
+          <ns0:cNvSpPr/>
+          <ns0:nvPr/>
+        </ns0:nvSpPr>
+        <ns0:spPr>
           <a:xfrm>
             <a:off x="6199632" y="1600200"/>
             <a:ext cx="5257800" cy="1600200"/>
@@ -3061,15 +3022,15 @@
               </a:srgbClr>
             </a:outerShdw>
           </a:effectLst>
-        </p:spPr>
-      </p:sp>
-      <p:sp>
-        <p:nvSpPr>
-          <p:cNvPr id="10" name="Shape 8"/>
-          <p:cNvSpPr/>
-          <p:nvPr/>
-        </p:nvSpPr>
-        <p:spPr>
+        </ns0:spPr>
+      </ns0:sp>
+      <ns0:sp>
+        <ns0:nvSpPr>
+          <ns0:cNvPr id="10" name="Shape 8"/>
+          <ns0:cNvSpPr/>
+          <ns0:nvPr/>
+        </ns0:nvSpPr>
+        <ns0:spPr>
           <a:xfrm>
             <a:off x="6364224" y="1764792"/>
             <a:ext cx="438912" cy="438912"/>
@@ -3086,15 +3047,15 @@
             </a:solidFill>
             <a:prstDash val="solid"/>
           </a:ln>
-        </p:spPr>
-      </p:sp>
-      <p:sp>
-        <p:nvSpPr>
-          <p:cNvPr id="11" name="Text 9"/>
-          <p:cNvSpPr/>
-          <p:nvPr/>
-        </p:nvSpPr>
-        <p:spPr>
+        </ns0:spPr>
+      </ns0:sp>
+      <ns0:sp>
+        <ns0:nvSpPr>
+          <ns0:cNvPr id="11" name="Text 9"/>
+          <ns0:cNvSpPr/>
+          <ns0:nvPr/>
+        </ns0:nvSpPr>
+        <ns0:spPr>
           <a:xfrm>
             <a:off x="6364224" y="1764792"/>
             <a:ext cx="438912" cy="438912"/>
@@ -3104,8 +3065,8 @@
           </a:prstGeom>
           <a:noFill/>
           <a:ln/>
-        </p:spPr>
-        <p:txBody>
+        </ns0:spPr>
+        <ns0:txBody>
           <a:bodyPr wrap="square" lIns="508" tIns="508" rIns="508" bIns="508" rtlCol="0" anchor="ctr">
             <a:normAutofit/>
           </a:bodyPr>
@@ -3127,15 +3088,15 @@
             </a:r>
             <a:endParaRPr lang="en-US" sz="1300" dirty="0"/>
           </a:p>
-        </p:txBody>
-      </p:sp>
-      <p:sp>
-        <p:nvSpPr>
-          <p:cNvPr id="12" name="Text 10"/>
-          <p:cNvSpPr/>
-          <p:nvPr/>
-        </p:nvSpPr>
-        <p:spPr>
+        </ns0:txBody>
+      </ns0:sp>
+      <ns0:sp>
+        <ns0:nvSpPr>
+          <ns0:cNvPr id="12" name="Text 10"/>
+          <ns0:cNvSpPr/>
+          <ns0:nvPr/>
+        </ns0:nvSpPr>
+        <ns0:spPr>
           <a:xfrm>
             <a:off x="6931152" y="1755648"/>
             <a:ext cx="4361688" cy="1344168"/>
@@ -3145,8 +3106,8 @@
           </a:prstGeom>
           <a:noFill/>
           <a:ln/>
-        </p:spPr>
-        <p:txBody>
+        </ns0:spPr>
+        <ns0:txBody>
           <a:bodyPr wrap="square" lIns="508" tIns="508" rIns="508" bIns="508" rtlCol="0" anchor="ctr">
             <a:normAutofit/>
           </a:bodyPr>
@@ -3168,15 +3129,15 @@
             </a:r>
             <a:endParaRPr lang="en-US" sz="1650" dirty="0"/>
           </a:p>
-        </p:txBody>
-      </p:sp>
-      <p:sp>
-        <p:nvSpPr>
-          <p:cNvPr id="13" name="Shape 11"/>
-          <p:cNvSpPr/>
-          <p:nvPr/>
-        </p:nvSpPr>
-        <p:spPr>
+        </ns0:txBody>
+      </ns0:sp>
+      <ns0:sp>
+        <ns0:nvSpPr>
+          <ns0:cNvPr id="13" name="Shape 11"/>
+          <ns0:cNvSpPr/>
+          <ns0:nvPr/>
+        </ns0:nvSpPr>
+        <ns0:spPr>
           <a:xfrm>
             <a:off x="731520" y="3456432"/>
             <a:ext cx="5257800" cy="1600200"/>
@@ -3202,15 +3163,15 @@
               </a:srgbClr>
             </a:outerShdw>
           </a:effectLst>
-        </p:spPr>
-      </p:sp>
-      <p:sp>
-        <p:nvSpPr>
-          <p:cNvPr id="14" name="Shape 12"/>
-          <p:cNvSpPr/>
-          <p:nvPr/>
-        </p:nvSpPr>
-        <p:spPr>
+        </ns0:spPr>
+      </ns0:sp>
+      <ns0:sp>
+        <ns0:nvSpPr>
+          <ns0:cNvPr id="14" name="Shape 12"/>
+          <ns0:cNvSpPr/>
+          <ns0:nvPr/>
+        </ns0:nvSpPr>
+        <ns0:spPr>
           <a:xfrm>
             <a:off x="896112" y="3621024"/>
             <a:ext cx="438912" cy="438912"/>
@@ -3227,15 +3188,15 @@
             </a:solidFill>
             <a:prstDash val="solid"/>
           </a:ln>
-        </p:spPr>
-      </p:sp>
-      <p:sp>
-        <p:nvSpPr>
-          <p:cNvPr id="15" name="Text 13"/>
-          <p:cNvSpPr/>
-          <p:nvPr/>
-        </p:nvSpPr>
-        <p:spPr>
+        </ns0:spPr>
+      </ns0:sp>
+      <ns0:sp>
+        <ns0:nvSpPr>
+          <ns0:cNvPr id="15" name="Text 13"/>
+          <ns0:cNvSpPr/>
+          <ns0:nvPr/>
+        </ns0:nvSpPr>
+        <ns0:spPr>
           <a:xfrm>
             <a:off x="896112" y="3621024"/>
             <a:ext cx="438912" cy="438912"/>
@@ -3245,8 +3206,8 @@
           </a:prstGeom>
           <a:noFill/>
           <a:ln/>
-        </p:spPr>
-        <p:txBody>
+        </ns0:spPr>
+        <ns0:txBody>
           <a:bodyPr wrap="square" lIns="508" tIns="508" rIns="508" bIns="508" rtlCol="0" anchor="ctr">
             <a:normAutofit/>
           </a:bodyPr>
@@ -3268,15 +3229,15 @@
             </a:r>
             <a:endParaRPr lang="en-US" sz="1300" dirty="0"/>
           </a:p>
-        </p:txBody>
-      </p:sp>
-      <p:sp>
-        <p:nvSpPr>
-          <p:cNvPr id="16" name="Text 14"/>
-          <p:cNvSpPr/>
-          <p:nvPr/>
-        </p:nvSpPr>
-        <p:spPr>
+        </ns0:txBody>
+      </ns0:sp>
+      <ns0:sp>
+        <ns0:nvSpPr>
+          <ns0:cNvPr id="16" name="Text 14"/>
+          <ns0:cNvSpPr/>
+          <ns0:nvPr/>
+        </ns0:nvSpPr>
+        <ns0:spPr>
           <a:xfrm>
             <a:off x="1463040" y="3611880"/>
             <a:ext cx="4361688" cy="1344168"/>
@@ -3286,8 +3247,8 @@
           </a:prstGeom>
           <a:noFill/>
           <a:ln/>
-        </p:spPr>
-        <p:txBody>
+        </ns0:spPr>
+        <ns0:txBody>
           <a:bodyPr wrap="square" lIns="508" tIns="508" rIns="508" bIns="508" rtlCol="0" anchor="ctr">
             <a:normAutofit/>
           </a:bodyPr>
@@ -3309,15 +3270,15 @@
             </a:r>
             <a:endParaRPr lang="en-US" sz="1650" dirty="0"/>
           </a:p>
-        </p:txBody>
-      </p:sp>
-      <p:sp>
-        <p:nvSpPr>
-          <p:cNvPr id="17" name="Shape 15"/>
-          <p:cNvSpPr/>
-          <p:nvPr/>
-        </p:nvSpPr>
-        <p:spPr>
+        </ns0:txBody>
+      </ns0:sp>
+      <ns0:sp>
+        <ns0:nvSpPr>
+          <ns0:cNvPr id="17" name="Shape 15"/>
+          <ns0:cNvSpPr/>
+          <ns0:nvPr/>
+        </ns0:nvSpPr>
+        <ns0:spPr>
           <a:xfrm>
             <a:off x="6199632" y="3456432"/>
             <a:ext cx="5257800" cy="1600200"/>
@@ -3343,15 +3304,15 @@
               </a:srgbClr>
             </a:outerShdw>
           </a:effectLst>
-        </p:spPr>
-      </p:sp>
-      <p:sp>
-        <p:nvSpPr>
-          <p:cNvPr id="18" name="Shape 16"/>
-          <p:cNvSpPr/>
-          <p:nvPr/>
-        </p:nvSpPr>
-        <p:spPr>
+        </ns0:spPr>
+      </ns0:sp>
+      <ns0:sp>
+        <ns0:nvSpPr>
+          <ns0:cNvPr id="18" name="Shape 16"/>
+          <ns0:cNvSpPr/>
+          <ns0:nvPr/>
+        </ns0:nvSpPr>
+        <ns0:spPr>
           <a:xfrm>
             <a:off x="6364224" y="3621024"/>
             <a:ext cx="438912" cy="438912"/>
@@ -3368,15 +3329,15 @@
             </a:solidFill>
             <a:prstDash val="solid"/>
           </a:ln>
-        </p:spPr>
-      </p:sp>
-      <p:sp>
-        <p:nvSpPr>
-          <p:cNvPr id="19" name="Text 17"/>
-          <p:cNvSpPr/>
-          <p:nvPr/>
-        </p:nvSpPr>
-        <p:spPr>
+        </ns0:spPr>
+      </ns0:sp>
+      <ns0:sp>
+        <ns0:nvSpPr>
+          <ns0:cNvPr id="19" name="Text 17"/>
+          <ns0:cNvSpPr/>
+          <ns0:nvPr/>
+        </ns0:nvSpPr>
+        <ns0:spPr>
           <a:xfrm>
             <a:off x="6364224" y="3621024"/>
             <a:ext cx="438912" cy="438912"/>
@@ -3386,8 +3347,8 @@
           </a:prstGeom>
           <a:noFill/>
           <a:ln/>
-        </p:spPr>
-        <p:txBody>
+        </ns0:spPr>
+        <ns0:txBody>
           <a:bodyPr wrap="square" lIns="508" tIns="508" rIns="508" bIns="508" rtlCol="0" anchor="ctr">
             <a:normAutofit/>
           </a:bodyPr>
@@ -3409,15 +3370,15 @@
             </a:r>
             <a:endParaRPr lang="en-US" sz="1300" dirty="0"/>
           </a:p>
-        </p:txBody>
-      </p:sp>
-      <p:sp>
-        <p:nvSpPr>
-          <p:cNvPr id="20" name="Text 18"/>
-          <p:cNvSpPr/>
-          <p:nvPr/>
-        </p:nvSpPr>
-        <p:spPr>
+        </ns0:txBody>
+      </ns0:sp>
+      <ns0:sp>
+        <ns0:nvSpPr>
+          <ns0:cNvPr id="20" name="Text 18"/>
+          <ns0:cNvSpPr/>
+          <ns0:nvPr/>
+        </ns0:nvSpPr>
+        <ns0:spPr>
           <a:xfrm>
             <a:off x="6931152" y="3611880"/>
             <a:ext cx="4361688" cy="1344168"/>
@@ -3427,8 +3388,8 @@
           </a:prstGeom>
           <a:noFill/>
           <a:ln/>
-        </p:spPr>
-        <p:txBody>
+        </ns0:spPr>
+        <ns0:txBody>
           <a:bodyPr wrap="square" lIns="508" tIns="508" rIns="508" bIns="508" rtlCol="0" anchor="ctr">
             <a:normAutofit/>
           </a:bodyPr>
@@ -3450,15 +3411,15 @@
             </a:r>
             <a:endParaRPr lang="en-US" sz="1650" dirty="0"/>
           </a:p>
-        </p:txBody>
-      </p:sp>
-      <p:sp>
-        <p:nvSpPr>
-          <p:cNvPr id="21" name="Text 19"/>
-          <p:cNvSpPr/>
-          <p:nvPr/>
-        </p:nvSpPr>
-        <p:spPr>
+        </ns0:txBody>
+      </ns0:sp>
+      <ns0:sp>
+        <ns0:nvSpPr>
+          <ns0:cNvPr id="21" name="Text 19"/>
+          <ns0:cNvSpPr/>
+          <ns0:nvPr/>
+        </ns0:nvSpPr>
+        <ns0:spPr>
           <a:xfrm>
             <a:off x="749808" y="5532120"/>
             <a:ext cx="4754880" cy="274320"/>
@@ -3468,8 +3429,8 @@
           </a:prstGeom>
           <a:noFill/>
           <a:ln/>
-        </p:spPr>
-        <p:txBody>
+        </ns0:spPr>
+        <ns0:txBody>
           <a:bodyPr wrap="square" lIns="508" tIns="508" rIns="508" bIns="508" rtlCol="0" anchor="ctr">
             <a:normAutofit/>
           </a:bodyPr>
@@ -3487,23 +3448,23 @@
                 <a:ea typeface="Arial" pitchFamily="34" charset="-122"/>
                 <a:cs typeface="Arial" pitchFamily="34" charset="-120"/>
               </a:rPr>
-              <a:t>Ziel: erst Sicherheit gewinnen – dann steigern.</a:t>
+              <a:t/>
             </a:r>
             <a:endParaRPr lang="en-US" sz="1150" dirty="0"/>
           </a:p>
-        </p:txBody>
-      </p:sp>
-      <p:sp>
-        <p:nvSpPr>
-          <p:cNvPr id="25" name="Slide Number Placeholder 0"/>
-          <p:cNvSpPr>
+        </ns0:txBody>
+      </ns0:sp>
+      <ns0:sp>
+        <ns0:nvSpPr>
+          <ns0:cNvPr id="25" name="Slide Number Placeholder 0"/>
+          <ns0:cNvSpPr>
             <a:spLocks noGrp="1"/>
-          </p:cNvSpPr>
-          <p:nvPr>
-            <p:ph type="sldNum" sz="quarter" idx="4294967295"/>
-          </p:nvPr>
-        </p:nvSpPr>
-        <p:spPr>
+          </ns0:cNvSpPr>
+          <ns0:nvPr>
+            <ns0:ph type="sldNum" sz="quarter" idx="4294967295"/>
+          </ns0:nvPr>
+        </ns0:nvSpPr>
+        <ns0:spPr>
           <a:xfrm>
             <a:off x="11384280" y="6492240"/>
             <a:ext cx="320040" cy="164592"/>
@@ -3513,11 +3474,11 @@
           </a:prstGeom>
           <a:extLst>
             <a:ext uri="{C572A759-6A51-4108-AA02-DFA0A04FC94B}">
-              <ma14:wrappingTextBoxFlag xmlns:ma14="http://schemas.microsoft.com/office/mac/drawingml/2011/main" val="0"/>
+              <ns2:wrappingTextBoxFlag val="0"/>
             </a:ext>
           </a:extLst>
-        </p:spPr>
-        <p:txBody>
+        </ns0:spPr>
+        <ns0:txBody>
           <a:bodyPr/>
           <a:lstStyle>
             <a:lvl1pPr>
@@ -3539,14 +3500,14 @@
             </a:fld>
             <a:endParaRPr lang="en-US"/>
           </a:p>
-        </p:txBody>
-      </p:sp>
-    </p:spTree>
-  </p:cSld>
-  <p:clrMapOvr>
+        </ns0:txBody>
+      </ns0:sp>
+    </ns0:spTree>
+  </ns0:cSld>
+  <ns0:clrMapOvr>
     <a:masterClrMapping/>
-  </p:clrMapOvr>
-</p:sld>
+  </ns0:clrMapOvr>
+</ns0:sld>
 </file>
 
 <file path=ppt/slides/slide3.xml><?xml version="1.0" encoding="utf-8"?>
@@ -7095,29 +7056,29 @@
 </file>
 
 <file path=ppt/slides/slide8.xml><?xml version="1.0" encoding="utf-8"?>
-<p:sld xmlns:a="http://schemas.openxmlformats.org/drawingml/2006/main" xmlns:r="http://schemas.openxmlformats.org/officeDocument/2006/relationships" xmlns:p="http://schemas.openxmlformats.org/presentationml/2006/main">
-  <p:cSld name="Slide 8">
-    <p:spTree>
-      <p:nvGrpSpPr>
-        <p:cNvPr id="1" name=""/>
-        <p:cNvGrpSpPr/>
-        <p:nvPr/>
-      </p:nvGrpSpPr>
-      <p:grpSpPr>
+<ns0:sld xmlns:a="http://schemas.openxmlformats.org/drawingml/2006/main" xmlns:ns0="http://schemas.openxmlformats.org/presentationml/2006/main" xmlns:ns2="http://schemas.microsoft.com/office/mac/drawingml/2011/main">
+  <ns0:cSld name="Slide 8">
+    <ns0:spTree>
+      <ns0:nvGrpSpPr>
+        <ns0:cNvPr id="1" name=""/>
+        <ns0:cNvGrpSpPr/>
+        <ns0:nvPr/>
+      </ns0:nvGrpSpPr>
+      <ns0:grpSpPr>
         <a:xfrm>
           <a:off x="0" y="0"/>
           <a:ext cx="0" cy="0"/>
           <a:chOff x="0" y="0"/>
           <a:chExt cx="0" cy="0"/>
         </a:xfrm>
-      </p:grpSpPr>
-      <p:sp>
-        <p:nvSpPr>
-          <p:cNvPr id="2" name="Text 0"/>
-          <p:cNvSpPr/>
-          <p:nvPr/>
-        </p:nvSpPr>
-        <p:spPr>
+      </ns0:grpSpPr>
+      <ns0:sp>
+        <ns0:nvSpPr>
+          <ns0:cNvPr id="2" name="Text 0"/>
+          <ns0:cNvSpPr/>
+          <ns0:nvPr/>
+        </ns0:nvSpPr>
+        <ns0:spPr>
           <a:xfrm>
             <a:off x="685800" y="1207008"/>
             <a:ext cx="7680960" cy="512064"/>
@@ -7127,8 +7088,8 @@
           </a:prstGeom>
           <a:noFill/>
           <a:ln/>
-        </p:spPr>
-        <p:txBody>
+        </ns0:spPr>
+        <ns0:txBody>
           <a:bodyPr wrap="square" lIns="508" tIns="508" rIns="508" bIns="508" rtlCol="0" anchor="ctr">
             <a:normAutofit/>
           </a:bodyPr>
@@ -7146,19 +7107,19 @@
                 <a:ea typeface="Arial" pitchFamily="34" charset="-122"/>
                 <a:cs typeface="Arial" pitchFamily="34" charset="-120"/>
               </a:rPr>
-              <a:t>Kontrollfragen im Abiturstil</a:t>
+              <a:t>Kontrollfragen</a:t>
             </a:r>
             <a:endParaRPr lang="en-US" sz="2700" dirty="0"/>
           </a:p>
-        </p:txBody>
-      </p:sp>
-      <p:sp>
-        <p:nvSpPr>
-          <p:cNvPr id="3" name="Text 1"/>
-          <p:cNvSpPr/>
-          <p:nvPr/>
-        </p:nvSpPr>
-        <p:spPr>
+        </ns0:txBody>
+      </ns0:sp>
+      <ns0:sp>
+        <ns0:nvSpPr>
+          <ns0:cNvPr id="3" name="Text 1"/>
+          <ns0:cNvSpPr/>
+          <ns0:nvPr/>
+        </ns0:nvSpPr>
+        <ns0:spPr>
           <a:xfrm>
             <a:off x="713232" y="1737360"/>
             <a:ext cx="10424160" cy="256032"/>
@@ -7168,8 +7129,8 @@
           </a:prstGeom>
           <a:noFill/>
           <a:ln/>
-        </p:spPr>
-        <p:txBody>
+        </ns0:spPr>
+        <ns0:txBody>
           <a:bodyPr wrap="square" lIns="508" tIns="508" rIns="508" bIns="508" rtlCol="0" anchor="ctr">
             <a:normAutofit/>
           </a:bodyPr>
@@ -7187,19 +7148,19 @@
                 <a:ea typeface="Arial" pitchFamily="34" charset="-122"/>
                 <a:cs typeface="Arial" pitchFamily="34" charset="-120"/>
               </a:rPr>
-              <a:t>Qualifikationsphase – Leistungskurs (Q1/Q2) · Analytische Geometrie und Lineare Algebra · an wiederkehrenden Abitur-Schwerpunkten orientiert</a:t>
+              <a:t>Qualifikationsphase – Leistungskurs (Q1/Q2) · Analytische Geometrie und Lineare Algebra</a:t>
             </a:r>
             <a:endParaRPr lang="en-US" sz="1250" dirty="0"/>
           </a:p>
-        </p:txBody>
-      </p:sp>
-      <p:sp>
-        <p:nvSpPr>
-          <p:cNvPr id="4" name="Shape 2"/>
-          <p:cNvSpPr/>
-          <p:nvPr/>
-        </p:nvSpPr>
-        <p:spPr>
+        </ns0:txBody>
+      </ns0:sp>
+      <ns0:sp>
+        <ns0:nvSpPr>
+          <ns0:cNvPr id="4" name="Shape 2"/>
+          <ns0:cNvSpPr/>
+          <ns0:nvPr/>
+        </ns0:nvSpPr>
+        <ns0:spPr>
           <a:xfrm>
             <a:off x="731520" y="2331720"/>
             <a:ext cx="5230368" cy="841248"/>
@@ -7218,15 +7179,15 @@
             </a:solidFill>
             <a:prstDash val="solid"/>
           </a:ln>
-        </p:spPr>
-      </p:sp>
-      <p:sp>
-        <p:nvSpPr>
-          <p:cNvPr id="5" name="Shape 3"/>
-          <p:cNvSpPr/>
-          <p:nvPr/>
-        </p:nvSpPr>
-        <p:spPr>
+        </ns0:spPr>
+      </ns0:sp>
+      <ns0:sp>
+        <ns0:nvSpPr>
+          <ns0:cNvPr id="5" name="Shape 3"/>
+          <ns0:cNvSpPr/>
+          <ns0:nvPr/>
+        </ns0:nvSpPr>
+        <ns0:spPr>
           <a:xfrm>
             <a:off x="859536" y="2496312"/>
             <a:ext cx="1170432" cy="274320"/>
@@ -7245,15 +7206,15 @@
             </a:solidFill>
             <a:prstDash val="solid"/>
           </a:ln>
-        </p:spPr>
-      </p:sp>
-      <p:sp>
-        <p:nvSpPr>
-          <p:cNvPr id="6" name="Text 4"/>
-          <p:cNvSpPr/>
-          <p:nvPr/>
-        </p:nvSpPr>
-        <p:spPr>
+        </ns0:spPr>
+      </ns0:sp>
+      <ns0:sp>
+        <ns0:nvSpPr>
+          <ns0:cNvPr id="6" name="Text 4"/>
+          <ns0:cNvSpPr/>
+          <ns0:nvPr/>
+        </ns0:nvSpPr>
+        <ns0:spPr>
           <a:xfrm>
             <a:off x="896112" y="2514600"/>
             <a:ext cx="1097280" cy="210312"/>
@@ -7263,8 +7224,8 @@
           </a:prstGeom>
           <a:noFill/>
           <a:ln/>
-        </p:spPr>
-        <p:txBody>
+        </ns0:spPr>
+        <ns0:txBody>
           <a:bodyPr wrap="square" lIns="508" tIns="508" rIns="508" bIns="508" rtlCol="0" anchor="ctr">
             <a:normAutofit/>
           </a:bodyPr>
@@ -7286,15 +7247,15 @@
             </a:r>
             <a:endParaRPr lang="en-US" sz="820" dirty="0"/>
           </a:p>
-        </p:txBody>
-      </p:sp>
-      <p:sp>
-        <p:nvSpPr>
-          <p:cNvPr id="7" name="Text 5"/>
-          <p:cNvSpPr/>
-          <p:nvPr/>
-        </p:nvSpPr>
-        <p:spPr>
+        </ns0:txBody>
+      </ns0:sp>
+      <ns0:sp>
+        <ns0:nvSpPr>
+          <ns0:cNvPr id="7" name="Text 5"/>
+          <ns0:cNvSpPr/>
+          <ns0:nvPr/>
+        </ns0:nvSpPr>
+        <ns0:spPr>
           <a:xfrm>
             <a:off x="2194560" y="2432304"/>
             <a:ext cx="3621024" cy="621792"/>
@@ -7304,8 +7265,8 @@
           </a:prstGeom>
           <a:noFill/>
           <a:ln/>
-        </p:spPr>
-        <p:txBody>
+        </ns0:spPr>
+        <ns0:txBody>
           <a:bodyPr wrap="square" lIns="508" tIns="508" rIns="508" bIns="508" rtlCol="0" anchor="ctr">
             <a:normAutofit/>
           </a:bodyPr>
@@ -7327,15 +7288,15 @@
             </a:r>
             <a:endParaRPr lang="en-US" sz="1230" dirty="0"/>
           </a:p>
-        </p:txBody>
-      </p:sp>
-      <p:sp>
-        <p:nvSpPr>
-          <p:cNvPr id="8" name="Shape 6"/>
-          <p:cNvSpPr/>
-          <p:nvPr/>
-        </p:nvSpPr>
-        <p:spPr>
+        </ns0:txBody>
+      </ns0:sp>
+      <ns0:sp>
+        <ns0:nvSpPr>
+          <ns0:cNvPr id="8" name="Shape 6"/>
+          <ns0:cNvSpPr/>
+          <ns0:nvPr/>
+        </ns0:nvSpPr>
+        <ns0:spPr>
           <a:xfrm>
             <a:off x="6236208" y="2331720"/>
             <a:ext cx="5230368" cy="841248"/>
@@ -7354,15 +7315,15 @@
             </a:solidFill>
             <a:prstDash val="solid"/>
           </a:ln>
-        </p:spPr>
-      </p:sp>
-      <p:sp>
-        <p:nvSpPr>
-          <p:cNvPr id="9" name="Shape 7"/>
-          <p:cNvSpPr/>
-          <p:nvPr/>
-        </p:nvSpPr>
-        <p:spPr>
+        </ns0:spPr>
+      </ns0:sp>
+      <ns0:sp>
+        <ns0:nvSpPr>
+          <ns0:cNvPr id="9" name="Shape 7"/>
+          <ns0:cNvSpPr/>
+          <ns0:nvPr/>
+        </ns0:nvSpPr>
+        <ns0:spPr>
           <a:xfrm>
             <a:off x="6364224" y="2496312"/>
             <a:ext cx="1170432" cy="274320"/>
@@ -7381,15 +7342,15 @@
             </a:solidFill>
             <a:prstDash val="solid"/>
           </a:ln>
-        </p:spPr>
-      </p:sp>
-      <p:sp>
-        <p:nvSpPr>
-          <p:cNvPr id="10" name="Text 8"/>
-          <p:cNvSpPr/>
-          <p:nvPr/>
-        </p:nvSpPr>
-        <p:spPr>
+        </ns0:spPr>
+      </ns0:sp>
+      <ns0:sp>
+        <ns0:nvSpPr>
+          <ns0:cNvPr id="10" name="Text 8"/>
+          <ns0:cNvSpPr/>
+          <ns0:nvPr/>
+        </ns0:nvSpPr>
+        <ns0:spPr>
           <a:xfrm>
             <a:off x="6400800" y="2514600"/>
             <a:ext cx="1097280" cy="210312"/>
@@ -7399,8 +7360,8 @@
           </a:prstGeom>
           <a:noFill/>
           <a:ln/>
-        </p:spPr>
-        <p:txBody>
+        </ns0:spPr>
+        <ns0:txBody>
           <a:bodyPr wrap="square" lIns="508" tIns="508" rIns="508" bIns="508" rtlCol="0" anchor="ctr">
             <a:normAutofit/>
           </a:bodyPr>
@@ -7422,15 +7383,15 @@
             </a:r>
             <a:endParaRPr lang="en-US" sz="820" dirty="0"/>
           </a:p>
-        </p:txBody>
-      </p:sp>
-      <p:sp>
-        <p:nvSpPr>
-          <p:cNvPr id="11" name="Text 9"/>
-          <p:cNvSpPr/>
-          <p:nvPr/>
-        </p:nvSpPr>
-        <p:spPr>
+        </ns0:txBody>
+      </ns0:sp>
+      <ns0:sp>
+        <ns0:nvSpPr>
+          <ns0:cNvPr id="11" name="Text 9"/>
+          <ns0:cNvSpPr/>
+          <ns0:nvPr/>
+        </ns0:nvSpPr>
+        <ns0:spPr>
           <a:xfrm>
             <a:off x="7699248" y="2432304"/>
             <a:ext cx="3621024" cy="621792"/>
@@ -7440,8 +7401,8 @@
           </a:prstGeom>
           <a:noFill/>
           <a:ln/>
-        </p:spPr>
-        <p:txBody>
+        </ns0:spPr>
+        <ns0:txBody>
           <a:bodyPr wrap="square" lIns="508" tIns="508" rIns="508" bIns="508" rtlCol="0" anchor="ctr">
             <a:normAutofit/>
           </a:bodyPr>
@@ -7463,15 +7424,15 @@
             </a:r>
             <a:endParaRPr lang="en-US" sz="1230" dirty="0"/>
           </a:p>
-        </p:txBody>
-      </p:sp>
-      <p:sp>
-        <p:nvSpPr>
-          <p:cNvPr id="12" name="Shape 10"/>
-          <p:cNvSpPr/>
-          <p:nvPr/>
-        </p:nvSpPr>
-        <p:spPr>
+        </ns0:txBody>
+      </ns0:sp>
+      <ns0:sp>
+        <ns0:nvSpPr>
+          <ns0:cNvPr id="12" name="Shape 10"/>
+          <ns0:cNvSpPr/>
+          <ns0:nvPr/>
+        </ns0:nvSpPr>
+        <ns0:spPr>
           <a:xfrm>
             <a:off x="731520" y="3429000"/>
             <a:ext cx="5230368" cy="841248"/>
@@ -7490,15 +7451,15 @@
             </a:solidFill>
             <a:prstDash val="solid"/>
           </a:ln>
-        </p:spPr>
-      </p:sp>
-      <p:sp>
-        <p:nvSpPr>
-          <p:cNvPr id="13" name="Shape 11"/>
-          <p:cNvSpPr/>
-          <p:nvPr/>
-        </p:nvSpPr>
-        <p:spPr>
+        </ns0:spPr>
+      </ns0:sp>
+      <ns0:sp>
+        <ns0:nvSpPr>
+          <ns0:cNvPr id="13" name="Shape 11"/>
+          <ns0:cNvSpPr/>
+          <ns0:nvPr/>
+        </ns0:nvSpPr>
+        <ns0:spPr>
           <a:xfrm>
             <a:off x="859536" y="3593592"/>
             <a:ext cx="1170432" cy="274320"/>
@@ -7517,15 +7478,15 @@
             </a:solidFill>
             <a:prstDash val="solid"/>
           </a:ln>
-        </p:spPr>
-      </p:sp>
-      <p:sp>
-        <p:nvSpPr>
-          <p:cNvPr id="14" name="Text 12"/>
-          <p:cNvSpPr/>
-          <p:nvPr/>
-        </p:nvSpPr>
-        <p:spPr>
+        </ns0:spPr>
+      </ns0:sp>
+      <ns0:sp>
+        <ns0:nvSpPr>
+          <ns0:cNvPr id="14" name="Text 12"/>
+          <ns0:cNvSpPr/>
+          <ns0:nvPr/>
+        </ns0:nvSpPr>
+        <ns0:spPr>
           <a:xfrm>
             <a:off x="896112" y="3611880"/>
             <a:ext cx="1097280" cy="210312"/>
@@ -7535,8 +7496,8 @@
           </a:prstGeom>
           <a:noFill/>
           <a:ln/>
-        </p:spPr>
-        <p:txBody>
+        </ns0:spPr>
+        <ns0:txBody>
           <a:bodyPr wrap="square" lIns="508" tIns="508" rIns="508" bIns="508" rtlCol="0" anchor="ctr">
             <a:normAutofit/>
           </a:bodyPr>
@@ -7558,15 +7519,15 @@
             </a:r>
             <a:endParaRPr lang="en-US" sz="820" dirty="0"/>
           </a:p>
-        </p:txBody>
-      </p:sp>
-      <p:sp>
-        <p:nvSpPr>
-          <p:cNvPr id="15" name="Text 13"/>
-          <p:cNvSpPr/>
-          <p:nvPr/>
-        </p:nvSpPr>
-        <p:spPr>
+        </ns0:txBody>
+      </ns0:sp>
+      <ns0:sp>
+        <ns0:nvSpPr>
+          <ns0:cNvPr id="15" name="Text 13"/>
+          <ns0:cNvSpPr/>
+          <ns0:nvPr/>
+        </ns0:nvSpPr>
+        <ns0:spPr>
           <a:xfrm>
             <a:off x="2194560" y="3529584"/>
             <a:ext cx="3621024" cy="621792"/>
@@ -7576,8 +7537,8 @@
           </a:prstGeom>
           <a:noFill/>
           <a:ln/>
-        </p:spPr>
-        <p:txBody>
+        </ns0:spPr>
+        <ns0:txBody>
           <a:bodyPr wrap="square" lIns="508" tIns="508" rIns="508" bIns="508" rtlCol="0" anchor="ctr">
             <a:normAutofit/>
           </a:bodyPr>
@@ -7599,15 +7560,15 @@
             </a:r>
             <a:endParaRPr lang="en-US" sz="1230" dirty="0"/>
           </a:p>
-        </p:txBody>
-      </p:sp>
-      <p:sp>
-        <p:nvSpPr>
-          <p:cNvPr id="16" name="Shape 14"/>
-          <p:cNvSpPr/>
-          <p:nvPr/>
-        </p:nvSpPr>
-        <p:spPr>
+        </ns0:txBody>
+      </ns0:sp>
+      <ns0:sp>
+        <ns0:nvSpPr>
+          <ns0:cNvPr id="16" name="Shape 14"/>
+          <ns0:cNvSpPr/>
+          <ns0:nvPr/>
+        </ns0:nvSpPr>
+        <ns0:spPr>
           <a:xfrm>
             <a:off x="6236208" y="3429000"/>
             <a:ext cx="5230368" cy="841248"/>
@@ -7626,15 +7587,15 @@
             </a:solidFill>
             <a:prstDash val="solid"/>
           </a:ln>
-        </p:spPr>
-      </p:sp>
-      <p:sp>
-        <p:nvSpPr>
-          <p:cNvPr id="17" name="Shape 15"/>
-          <p:cNvSpPr/>
-          <p:nvPr/>
-        </p:nvSpPr>
-        <p:spPr>
+        </ns0:spPr>
+      </ns0:sp>
+      <ns0:sp>
+        <ns0:nvSpPr>
+          <ns0:cNvPr id="17" name="Shape 15"/>
+          <ns0:cNvSpPr/>
+          <ns0:nvPr/>
+        </ns0:nvSpPr>
+        <ns0:spPr>
           <a:xfrm>
             <a:off x="6364224" y="3593592"/>
             <a:ext cx="1170432" cy="274320"/>
@@ -7653,15 +7614,15 @@
             </a:solidFill>
             <a:prstDash val="solid"/>
           </a:ln>
-        </p:spPr>
-      </p:sp>
-      <p:sp>
-        <p:nvSpPr>
-          <p:cNvPr id="18" name="Text 16"/>
-          <p:cNvSpPr/>
-          <p:nvPr/>
-        </p:nvSpPr>
-        <p:spPr>
+        </ns0:spPr>
+      </ns0:sp>
+      <ns0:sp>
+        <ns0:nvSpPr>
+          <ns0:cNvPr id="18" name="Text 16"/>
+          <ns0:cNvSpPr/>
+          <ns0:nvPr/>
+        </ns0:nvSpPr>
+        <ns0:spPr>
           <a:xfrm>
             <a:off x="6400800" y="3611880"/>
             <a:ext cx="1097280" cy="210312"/>
@@ -7671,8 +7632,8 @@
           </a:prstGeom>
           <a:noFill/>
           <a:ln/>
-        </p:spPr>
-        <p:txBody>
+        </ns0:spPr>
+        <ns0:txBody>
           <a:bodyPr wrap="square" lIns="508" tIns="508" rIns="508" bIns="508" rtlCol="0" anchor="ctr">
             <a:normAutofit/>
           </a:bodyPr>
@@ -7694,15 +7655,15 @@
             </a:r>
             <a:endParaRPr lang="en-US" sz="820" dirty="0"/>
           </a:p>
-        </p:txBody>
-      </p:sp>
-      <p:sp>
-        <p:nvSpPr>
-          <p:cNvPr id="19" name="Text 17"/>
-          <p:cNvSpPr/>
-          <p:nvPr/>
-        </p:nvSpPr>
-        <p:spPr>
+        </ns0:txBody>
+      </ns0:sp>
+      <ns0:sp>
+        <ns0:nvSpPr>
+          <ns0:cNvPr id="19" name="Text 17"/>
+          <ns0:cNvSpPr/>
+          <ns0:nvPr/>
+        </ns0:nvSpPr>
+        <ns0:spPr>
           <a:xfrm>
             <a:off x="7699248" y="3529584"/>
             <a:ext cx="3621024" cy="621792"/>
@@ -7712,8 +7673,8 @@
           </a:prstGeom>
           <a:noFill/>
           <a:ln/>
-        </p:spPr>
-        <p:txBody>
+        </ns0:spPr>
+        <ns0:txBody>
           <a:bodyPr wrap="square" lIns="508" tIns="508" rIns="508" bIns="508" rtlCol="0" anchor="ctr">
             <a:normAutofit/>
           </a:bodyPr>
@@ -7735,15 +7696,15 @@
             </a:r>
             <a:endParaRPr lang="en-US" sz="1230" dirty="0"/>
           </a:p>
-        </p:txBody>
-      </p:sp>
-      <p:sp>
-        <p:nvSpPr>
-          <p:cNvPr id="20" name="Shape 18"/>
-          <p:cNvSpPr/>
-          <p:nvPr/>
-        </p:nvSpPr>
-        <p:spPr>
+        </ns0:txBody>
+      </ns0:sp>
+      <ns0:sp>
+        <ns0:nvSpPr>
+          <ns0:cNvPr id="20" name="Shape 18"/>
+          <ns0:cNvSpPr/>
+          <ns0:nvPr/>
+        </ns0:nvSpPr>
+        <ns0:spPr>
           <a:xfrm>
             <a:off x="731520" y="4526280"/>
             <a:ext cx="10762488" cy="841248"/>
@@ -7762,15 +7723,15 @@
             </a:solidFill>
             <a:prstDash val="solid"/>
           </a:ln>
-        </p:spPr>
-      </p:sp>
-      <p:sp>
-        <p:nvSpPr>
-          <p:cNvPr id="21" name="Shape 19"/>
-          <p:cNvSpPr/>
-          <p:nvPr/>
-        </p:nvSpPr>
-        <p:spPr>
+        </ns0:spPr>
+      </ns0:sp>
+      <ns0:sp>
+        <ns0:nvSpPr>
+          <ns0:cNvPr id="21" name="Shape 19"/>
+          <ns0:cNvSpPr/>
+          <ns0:nvPr/>
+        </ns0:nvSpPr>
+        <ns0:spPr>
           <a:xfrm>
             <a:off x="859536" y="4690872"/>
             <a:ext cx="1234440" cy="274320"/>
@@ -7789,15 +7750,15 @@
             </a:solidFill>
             <a:prstDash val="solid"/>
           </a:ln>
-        </p:spPr>
-      </p:sp>
-      <p:sp>
-        <p:nvSpPr>
-          <p:cNvPr id="22" name="Text 20"/>
-          <p:cNvSpPr/>
-          <p:nvPr/>
-        </p:nvSpPr>
-        <p:spPr>
+        </ns0:spPr>
+      </ns0:sp>
+      <ns0:sp>
+        <ns0:nvSpPr>
+          <ns0:cNvPr id="22" name="Text 20"/>
+          <ns0:cNvSpPr/>
+          <ns0:nvPr/>
+        </ns0:nvSpPr>
+        <ns0:spPr>
           <a:xfrm>
             <a:off x="896112" y="4709160"/>
             <a:ext cx="1161288" cy="210312"/>
@@ -7807,8 +7768,8 @@
           </a:prstGeom>
           <a:noFill/>
           <a:ln/>
-        </p:spPr>
-        <p:txBody>
+        </ns0:spPr>
+        <ns0:txBody>
           <a:bodyPr wrap="square" lIns="508" tIns="508" rIns="508" bIns="508" rtlCol="0" anchor="ctr">
             <a:normAutofit/>
           </a:bodyPr>
@@ -7830,15 +7791,15 @@
             </a:r>
             <a:endParaRPr lang="en-US" sz="820" dirty="0"/>
           </a:p>
-        </p:txBody>
-      </p:sp>
-      <p:sp>
-        <p:nvSpPr>
-          <p:cNvPr id="23" name="Text 21"/>
-          <p:cNvSpPr/>
-          <p:nvPr/>
-        </p:nvSpPr>
-        <p:spPr>
+        </ns0:txBody>
+      </ns0:sp>
+      <ns0:sp>
+        <ns0:nvSpPr>
+          <ns0:cNvPr id="23" name="Text 21"/>
+          <ns0:cNvSpPr/>
+          <ns0:nvPr/>
+        </ns0:nvSpPr>
+        <ns0:spPr>
           <a:xfrm>
             <a:off x="2258568" y="4626864"/>
             <a:ext cx="9089136" cy="621792"/>
@@ -7848,8 +7809,8 @@
           </a:prstGeom>
           <a:noFill/>
           <a:ln/>
-        </p:spPr>
-        <p:txBody>
+        </ns0:spPr>
+        <ns0:txBody>
           <a:bodyPr wrap="square" lIns="508" tIns="508" rIns="508" bIns="508" rtlCol="0" anchor="ctr">
             <a:normAutofit/>
           </a:bodyPr>
@@ -7871,15 +7832,15 @@
             </a:r>
             <a:endParaRPr lang="en-US" sz="1300" dirty="0"/>
           </a:p>
-        </p:txBody>
-      </p:sp>
-      <p:sp>
-        <p:nvSpPr>
-          <p:cNvPr id="24" name="Text 22"/>
-          <p:cNvSpPr/>
-          <p:nvPr/>
-        </p:nvSpPr>
-        <p:spPr>
+        </ns0:txBody>
+      </ns0:sp>
+      <ns0:sp>
+        <ns0:nvSpPr>
+          <ns0:cNvPr id="24" name="Text 22"/>
+          <ns0:cNvSpPr/>
+          <ns0:nvPr/>
+        </ns0:nvSpPr>
+        <ns0:spPr>
           <a:xfrm>
             <a:off x="749808" y="5632704"/>
             <a:ext cx="5760720" cy="219456"/>
@@ -7889,8 +7850,8 @@
           </a:prstGeom>
           <a:noFill/>
           <a:ln/>
-        </p:spPr>
-        <p:txBody>
+        </ns0:spPr>
+        <ns0:txBody>
           <a:bodyPr wrap="square" lIns="508" tIns="508" rIns="508" bIns="508" rtlCol="0" anchor="ctr">
             <a:normAutofit/>
           </a:bodyPr>
@@ -7908,19 +7869,19 @@
                 <a:ea typeface="Arial" pitchFamily="34" charset="-122"/>
                 <a:cs typeface="Arial" pitchFamily="34" charset="-120"/>
               </a:rPr>
-              <a:t>Operatoren gemäß Standardsicherung NRW · gültig ab Abitur 2023</a:t>
+              <a:t/>
             </a:r>
             <a:endParaRPr lang="en-US" sz="940" dirty="0"/>
           </a:p>
-        </p:txBody>
-      </p:sp>
-      <p:sp>
-        <p:nvSpPr>
-          <p:cNvPr id="25" name="Text 23"/>
-          <p:cNvSpPr/>
-          <p:nvPr/>
-        </p:nvSpPr>
-        <p:spPr>
+        </ns0:txBody>
+      </ns0:sp>
+      <ns0:sp>
+        <ns0:nvSpPr>
+          <ns0:cNvPr id="25" name="Text 23"/>
+          <ns0:cNvSpPr/>
+          <ns0:nvPr/>
+        </ns0:nvSpPr>
+        <ns0:spPr>
           <a:xfrm>
             <a:off x="6629400" y="5605272"/>
             <a:ext cx="960120" cy="201168"/>
@@ -7930,8 +7891,8 @@
           </a:prstGeom>
           <a:noFill/>
           <a:ln/>
-        </p:spPr>
-        <p:txBody>
+        </ns0:spPr>
+        <ns0:txBody>
           <a:bodyPr wrap="square" lIns="508" tIns="508" rIns="508" bIns="508" rtlCol="0" anchor="ctr">
             <a:normAutofit/>
           </a:bodyPr>
@@ -7953,15 +7914,15 @@
             </a:r>
             <a:endParaRPr lang="en-US" sz="980" dirty="0"/>
           </a:p>
-        </p:txBody>
-      </p:sp>
-      <p:sp>
-        <p:nvSpPr>
-          <p:cNvPr id="26" name="Shape 24"/>
-          <p:cNvSpPr/>
-          <p:nvPr/>
-        </p:nvSpPr>
-        <p:spPr>
+        </ns0:txBody>
+      </ns0:sp>
+      <ns0:sp>
+        <ns0:nvSpPr>
+          <ns0:cNvPr id="26" name="Shape 24"/>
+          <ns0:cNvSpPr/>
+          <ns0:nvPr/>
+        </ns0:nvSpPr>
+        <ns0:spPr>
           <a:xfrm>
             <a:off x="7635240" y="5513832"/>
             <a:ext cx="1051560" cy="384048"/>
@@ -7982,15 +7943,15 @@
             </a:solidFill>
             <a:prstDash val="solid"/>
           </a:ln>
-        </p:spPr>
-      </p:sp>
-      <p:sp>
-        <p:nvSpPr>
-          <p:cNvPr id="27" name="Text 25"/>
-          <p:cNvSpPr/>
-          <p:nvPr/>
-        </p:nvSpPr>
-        <p:spPr>
+        </ns0:spPr>
+      </ns0:sp>
+      <ns0:sp>
+        <ns0:nvSpPr>
+          <ns0:cNvPr id="27" name="Text 25"/>
+          <ns0:cNvSpPr/>
+          <ns0:nvPr/>
+        </ns0:nvSpPr>
+        <ns0:spPr>
           <a:xfrm>
             <a:off x="7680960" y="5577840"/>
             <a:ext cx="960120" cy="219456"/>
@@ -8000,8 +7961,8 @@
           </a:prstGeom>
           <a:noFill/>
           <a:ln/>
-        </p:spPr>
-        <p:txBody>
+        </ns0:spPr>
+        <ns0:txBody>
           <a:bodyPr wrap="square" lIns="508" tIns="508" rIns="508" bIns="508" rtlCol="0" anchor="ctr">
             <a:normAutofit/>
           </a:bodyPr>
@@ -8023,15 +7984,15 @@
             </a:r>
             <a:endParaRPr lang="en-US" sz="930" dirty="0"/>
           </a:p>
-        </p:txBody>
-      </p:sp>
-      <p:sp>
-        <p:nvSpPr>
-          <p:cNvPr id="28" name="Shape 26"/>
-          <p:cNvSpPr/>
-          <p:nvPr/>
-        </p:nvSpPr>
-        <p:spPr>
+        </ns0:txBody>
+      </ns0:sp>
+      <ns0:sp>
+        <ns0:nvSpPr>
+          <ns0:cNvPr id="28" name="Shape 26"/>
+          <ns0:cNvSpPr/>
+          <ns0:nvPr/>
+        </ns0:nvSpPr>
+        <ns0:spPr>
           <a:xfrm>
             <a:off x="8842248" y="5513832"/>
             <a:ext cx="1051560" cy="384048"/>
@@ -8052,15 +8013,15 @@
             </a:solidFill>
             <a:prstDash val="solid"/>
           </a:ln>
-        </p:spPr>
-      </p:sp>
-      <p:sp>
-        <p:nvSpPr>
-          <p:cNvPr id="29" name="Text 27"/>
-          <p:cNvSpPr/>
-          <p:nvPr/>
-        </p:nvSpPr>
-        <p:spPr>
+        </ns0:spPr>
+      </ns0:sp>
+      <ns0:sp>
+        <ns0:nvSpPr>
+          <ns0:cNvPr id="29" name="Text 27"/>
+          <ns0:cNvSpPr/>
+          <ns0:nvPr/>
+        </ns0:nvSpPr>
+        <ns0:spPr>
           <a:xfrm>
             <a:off x="8887968" y="5577840"/>
             <a:ext cx="960120" cy="219456"/>
@@ -8070,8 +8031,8 @@
           </a:prstGeom>
           <a:noFill/>
           <a:ln/>
-        </p:spPr>
-        <p:txBody>
+        </ns0:spPr>
+        <ns0:txBody>
           <a:bodyPr wrap="square" lIns="508" tIns="508" rIns="508" bIns="508" rtlCol="0" anchor="ctr">
             <a:normAutofit/>
           </a:bodyPr>
@@ -8093,15 +8054,15 @@
             </a:r>
             <a:endParaRPr lang="en-US" sz="930" dirty="0"/>
           </a:p>
-        </p:txBody>
-      </p:sp>
-      <p:sp>
-        <p:nvSpPr>
-          <p:cNvPr id="30" name="Shape 28"/>
-          <p:cNvSpPr/>
-          <p:nvPr/>
-        </p:nvSpPr>
-        <p:spPr>
+        </ns0:txBody>
+      </ns0:sp>
+      <ns0:sp>
+        <ns0:nvSpPr>
+          <ns0:cNvPr id="30" name="Shape 28"/>
+          <ns0:cNvSpPr/>
+          <ns0:nvPr/>
+        </ns0:nvSpPr>
+        <ns0:spPr>
           <a:xfrm>
             <a:off x="10049256" y="5513832"/>
             <a:ext cx="1051560" cy="384048"/>
@@ -8122,15 +8083,15 @@
             </a:solidFill>
             <a:prstDash val="solid"/>
           </a:ln>
-        </p:spPr>
-      </p:sp>
-      <p:sp>
-        <p:nvSpPr>
-          <p:cNvPr id="31" name="Text 29"/>
-          <p:cNvSpPr/>
-          <p:nvPr/>
-        </p:nvSpPr>
-        <p:spPr>
+        </ns0:spPr>
+      </ns0:sp>
+      <ns0:sp>
+        <ns0:nvSpPr>
+          <ns0:cNvPr id="31" name="Text 29"/>
+          <ns0:cNvSpPr/>
+          <ns0:nvPr/>
+        </ns0:nvSpPr>
+        <ns0:spPr>
           <a:xfrm>
             <a:off x="10094976" y="5577840"/>
             <a:ext cx="960120" cy="219456"/>
@@ -8140,8 +8101,8 @@
           </a:prstGeom>
           <a:noFill/>
           <a:ln/>
-        </p:spPr>
-        <p:txBody>
+        </ns0:spPr>
+        <ns0:txBody>
           <a:bodyPr wrap="square" lIns="508" tIns="508" rIns="508" bIns="508" rtlCol="0" anchor="ctr">
             <a:normAutofit/>
           </a:bodyPr>
@@ -8163,19 +8124,19 @@
             </a:r>
             <a:endParaRPr lang="en-US" sz="930" dirty="0"/>
           </a:p>
-        </p:txBody>
-      </p:sp>
-      <p:sp>
-        <p:nvSpPr>
-          <p:cNvPr id="25" name="Slide Number Placeholder 0"/>
-          <p:cNvSpPr>
+        </ns0:txBody>
+      </ns0:sp>
+      <ns0:sp>
+        <ns0:nvSpPr>
+          <ns0:cNvPr id="25" name="Slide Number Placeholder 0"/>
+          <ns0:cNvSpPr>
             <a:spLocks noGrp="1"/>
-          </p:cNvSpPr>
-          <p:nvPr>
-            <p:ph type="sldNum" sz="quarter" idx="4294967295"/>
-          </p:nvPr>
-        </p:nvSpPr>
-        <p:spPr>
+          </ns0:cNvSpPr>
+          <ns0:nvPr>
+            <ns0:ph type="sldNum" sz="quarter" idx="4294967295"/>
+          </ns0:nvPr>
+        </ns0:nvSpPr>
+        <ns0:spPr>
           <a:xfrm>
             <a:off x="11658600" y="6446520"/>
             <a:ext cx="274320" cy="182880"/>
@@ -8185,11 +8146,11 @@
           </a:prstGeom>
           <a:extLst>
             <a:ext uri="{C572A759-6A51-4108-AA02-DFA0A04FC94B}">
-              <ma14:wrappingTextBoxFlag xmlns:ma14="http://schemas.microsoft.com/office/mac/drawingml/2011/main" val="0"/>
+              <ns2:wrappingTextBoxFlag val="0"/>
             </a:ext>
           </a:extLst>
-        </p:spPr>
-        <p:txBody>
+        </ns0:spPr>
+        <ns0:txBody>
           <a:bodyPr/>
           <a:lstStyle>
             <a:lvl1pPr>
@@ -8211,14 +8172,14 @@
             </a:fld>
             <a:endParaRPr lang="en-US"/>
           </a:p>
-        </p:txBody>
-      </p:sp>
-    </p:spTree>
-  </p:cSld>
-  <p:clrMapOvr>
+        </ns0:txBody>
+      </ns0:sp>
+    </ns0:spTree>
+  </ns0:cSld>
+  <ns0:clrMapOvr>
     <a:masterClrMapping/>
-  </p:clrMapOvr>
-</p:sld>
+  </ns0:clrMapOvr>
+</ns0:sld>
 </file>
 
 <file path=ppt/theme/theme1.xml><?xml version="1.0" encoding="utf-8"?>
